--- a/curso/pptx/S42.pptx
+++ b/curso/pptx/S42.pptx
@@ -3819,8 +3819,8 @@
         </p:nvSpPr>
         <p:spPr>
           <a:xfrm>
-            <a:off x="640000" y="420000"/>
-            <a:ext cx="10912000" cy="420000"/>
+            <a:off x="10652000" y="380000"/>
+            <a:ext cx="900000" cy="800000"/>
           </a:xfrm>
           <a:prstGeom prst="rect">
             <a:avLst/>
@@ -3835,17 +3835,17 @@
           <a:p>
             <a:pPr>
               <a:spcAft>
-                <a:spcPts val="810"/>
+                <a:spcPts val="1980"/>
               </a:spcAft>
             </a:pPr>
             <a:r>
-              <a:rPr sz="1800" b="1">
+              <a:rPr sz="4400" b="0">
                 <a:solidFill>
                   <a:srgbClr val="1F2A44"/>
                 </a:solidFill>
                 <a:latin typeface="Nunito Sans"/>
               </a:rPr>
-              <a:t>🦉 Aula de Filosofía</a:t>
+              <a:t>🙃</a:t>
             </a:r>
           </a:p>
         </p:txBody>

--- a/curso/pptx/S42.pptx
+++ b/curso/pptx/S42.pptx
@@ -470,356 +470,6 @@
     </a:lvl9pPr>
   </p:notesStyle>
 </p:notesMaster>
-</file>
-
-<file path=ppt/notesSlides/notesSlide1.xml><?xml version="1.0" encoding="utf-8"?>
-<p:notes xmlns:a="http://schemas.openxmlformats.org/drawingml/2006/main" xmlns:p="http://schemas.openxmlformats.org/presentationml/2006/main" xmlns:r="http://schemas.openxmlformats.org/officeDocument/2006/relationships">
-  <p:cSld>
-    <p:spTree>
-      <p:nvGrpSpPr>
-        <p:cNvPr id="1" name=""/>
-        <p:cNvGrpSpPr/>
-        <p:nvPr/>
-      </p:nvGrpSpPr>
-      <p:grpSpPr>
-        <a:xfrm>
-          <a:off x="0" y="0"/>
-          <a:ext cx="0" cy="0"/>
-          <a:chOff x="0" y="0"/>
-          <a:chExt cx="0" cy="0"/>
-        </a:xfrm>
-      </p:grpSpPr>
-      <p:sp>
-        <p:nvSpPr>
-          <p:cNvPr id="2" name="Slide Image Placeholder 1"/>
-          <p:cNvSpPr>
-            <a:spLocks noGrp="1"/>
-          </p:cNvSpPr>
-          <p:nvPr>
-            <p:ph type="sldImg" idx="2"/>
-          </p:nvPr>
-        </p:nvSpPr>
-        <p:spPr/>
-      </p:sp>
-      <p:sp>
-        <p:nvSpPr>
-          <p:cNvPr id="3" name="Notes Placeholder 2"/>
-          <p:cNvSpPr>
-            <a:spLocks noGrp="1"/>
-          </p:cNvSpPr>
-          <p:nvPr>
-            <p:ph type="body" idx="3" sz="quarter"/>
-          </p:nvPr>
-        </p:nvSpPr>
-        <p:spPr/>
-        <p:txBody>
-          <a:bodyPr/>
-          <a:lstStyle/>
-          <a:p>
-            <a:r>
-              <a:t>3 minutos. Sin apuntes. Es para recordar, no cuenta para nota.</a:t>
-            </a:r>
-          </a:p>
-        </p:txBody>
-      </p:sp>
-      <p:sp>
-        <p:nvSpPr>
-          <p:cNvPr id="4" name="Slide Number Placeholder 3"/>
-          <p:cNvSpPr>
-            <a:spLocks noGrp="1"/>
-          </p:cNvSpPr>
-          <p:nvPr>
-            <p:ph type="sldNum" idx="5" sz="quarter"/>
-          </p:nvPr>
-        </p:nvSpPr>
-        <p:spPr/>
-      </p:sp>
-    </p:spTree>
-  </p:cSld>
-  <p:clrMapOvr>
-    <a:masterClrMapping/>
-  </p:clrMapOvr>
-</p:notes>
-</file>
-
-<file path=ppt/notesSlides/notesSlide2.xml><?xml version="1.0" encoding="utf-8"?>
-<p:notes xmlns:a="http://schemas.openxmlformats.org/drawingml/2006/main" xmlns:p="http://schemas.openxmlformats.org/presentationml/2006/main" xmlns:r="http://schemas.openxmlformats.org/officeDocument/2006/relationships">
-  <p:cSld>
-    <p:spTree>
-      <p:nvGrpSpPr>
-        <p:cNvPr id="1" name=""/>
-        <p:cNvGrpSpPr/>
-        <p:nvPr/>
-      </p:nvGrpSpPr>
-      <p:grpSpPr>
-        <a:xfrm>
-          <a:off x="0" y="0"/>
-          <a:ext cx="0" cy="0"/>
-          <a:chOff x="0" y="0"/>
-          <a:chExt cx="0" cy="0"/>
-        </a:xfrm>
-      </p:grpSpPr>
-      <p:sp>
-        <p:nvSpPr>
-          <p:cNvPr id="2" name="Slide Image Placeholder 1"/>
-          <p:cNvSpPr>
-            <a:spLocks noGrp="1"/>
-          </p:cNvSpPr>
-          <p:nvPr>
-            <p:ph type="sldImg" idx="2"/>
-          </p:nvPr>
-        </p:nvSpPr>
-        <p:spPr/>
-      </p:sp>
-      <p:sp>
-        <p:nvSpPr>
-          <p:cNvPr id="3" name="Notes Placeholder 2"/>
-          <p:cNvSpPr>
-            <a:spLocks noGrp="1"/>
-          </p:cNvSpPr>
-          <p:nvPr>
-            <p:ph type="body" idx="3" sz="quarter"/>
-          </p:nvPr>
-        </p:nvSpPr>
-        <p:spPr/>
-        <p:txBody>
-          <a:bodyPr/>
-          <a:lstStyle/>
-          <a:p>
-            <a:r>
-              <a:t>3 minutos. Sin apuntes. Es para recordar, no cuenta para nota.</a:t>
-            </a:r>
-          </a:p>
-        </p:txBody>
-      </p:sp>
-      <p:sp>
-        <p:nvSpPr>
-          <p:cNvPr id="4" name="Slide Number Placeholder 3"/>
-          <p:cNvSpPr>
-            <a:spLocks noGrp="1"/>
-          </p:cNvSpPr>
-          <p:nvPr>
-            <p:ph type="sldNum" idx="5" sz="quarter"/>
-          </p:nvPr>
-        </p:nvSpPr>
-        <p:spPr/>
-      </p:sp>
-    </p:spTree>
-  </p:cSld>
-  <p:clrMapOvr>
-    <a:masterClrMapping/>
-  </p:clrMapOvr>
-</p:notes>
-</file>
-
-<file path=ppt/notesSlides/notesSlide3.xml><?xml version="1.0" encoding="utf-8"?>
-<p:notes xmlns:a="http://schemas.openxmlformats.org/drawingml/2006/main" xmlns:p="http://schemas.openxmlformats.org/presentationml/2006/main" xmlns:r="http://schemas.openxmlformats.org/officeDocument/2006/relationships">
-  <p:cSld>
-    <p:spTree>
-      <p:nvGrpSpPr>
-        <p:cNvPr id="1" name=""/>
-        <p:cNvGrpSpPr/>
-        <p:nvPr/>
-      </p:nvGrpSpPr>
-      <p:grpSpPr>
-        <a:xfrm>
-          <a:off x="0" y="0"/>
-          <a:ext cx="0" cy="0"/>
-          <a:chOff x="0" y="0"/>
-          <a:chExt cx="0" cy="0"/>
-        </a:xfrm>
-      </p:grpSpPr>
-      <p:sp>
-        <p:nvSpPr>
-          <p:cNvPr id="2" name="Slide Image Placeholder 1"/>
-          <p:cNvSpPr>
-            <a:spLocks noGrp="1"/>
-          </p:cNvSpPr>
-          <p:nvPr>
-            <p:ph type="sldImg" idx="2"/>
-          </p:nvPr>
-        </p:nvSpPr>
-        <p:spPr/>
-      </p:sp>
-      <p:sp>
-        <p:nvSpPr>
-          <p:cNvPr id="3" name="Notes Placeholder 2"/>
-          <p:cNvSpPr>
-            <a:spLocks noGrp="1"/>
-          </p:cNvSpPr>
-          <p:nvPr>
-            <p:ph type="body" idx="3" sz="quarter"/>
-          </p:nvPr>
-        </p:nvSpPr>
-        <p:spPr/>
-        <p:txBody>
-          <a:bodyPr/>
-          <a:lstStyle/>
-          <a:p>
-            <a:r>
-              <a:t>Nadie tiene que contestar: solo pensarlo.</a:t>
-            </a:r>
-          </a:p>
-        </p:txBody>
-      </p:sp>
-      <p:sp>
-        <p:nvSpPr>
-          <p:cNvPr id="4" name="Slide Number Placeholder 3"/>
-          <p:cNvSpPr>
-            <a:spLocks noGrp="1"/>
-          </p:cNvSpPr>
-          <p:nvPr>
-            <p:ph type="sldNum" idx="5" sz="quarter"/>
-          </p:nvPr>
-        </p:nvSpPr>
-        <p:spPr/>
-      </p:sp>
-    </p:spTree>
-  </p:cSld>
-  <p:clrMapOvr>
-    <a:masterClrMapping/>
-  </p:clrMapOvr>
-</p:notes>
-</file>
-
-<file path=ppt/notesSlides/notesSlide4.xml><?xml version="1.0" encoding="utf-8"?>
-<p:notes xmlns:a="http://schemas.openxmlformats.org/drawingml/2006/main" xmlns:p="http://schemas.openxmlformats.org/presentationml/2006/main" xmlns:r="http://schemas.openxmlformats.org/officeDocument/2006/relationships">
-  <p:cSld>
-    <p:spTree>
-      <p:nvGrpSpPr>
-        <p:cNvPr id="1" name=""/>
-        <p:cNvGrpSpPr/>
-        <p:nvPr/>
-      </p:nvGrpSpPr>
-      <p:grpSpPr>
-        <a:xfrm>
-          <a:off x="0" y="0"/>
-          <a:ext cx="0" cy="0"/>
-          <a:chOff x="0" y="0"/>
-          <a:chExt cx="0" cy="0"/>
-        </a:xfrm>
-      </p:grpSpPr>
-      <p:sp>
-        <p:nvSpPr>
-          <p:cNvPr id="2" name="Slide Image Placeholder 1"/>
-          <p:cNvSpPr>
-            <a:spLocks noGrp="1"/>
-          </p:cNvSpPr>
-          <p:nvPr>
-            <p:ph type="sldImg" idx="2"/>
-          </p:nvPr>
-        </p:nvSpPr>
-        <p:spPr/>
-      </p:sp>
-      <p:sp>
-        <p:nvSpPr>
-          <p:cNvPr id="3" name="Notes Placeholder 2"/>
-          <p:cNvSpPr>
-            <a:spLocks noGrp="1"/>
-          </p:cNvSpPr>
-          <p:nvPr>
-            <p:ph type="body" idx="3" sz="quarter"/>
-          </p:nvPr>
-        </p:nvSpPr>
-        <p:spPr/>
-        <p:txBody>
-          <a:bodyPr/>
-          <a:lstStyle/>
-          <a:p>
-            <a:r>
-              <a:t>Dejar unos segundos para que piensen la respuesta fácil antes de enseñar los pasos.</a:t>
-            </a:r>
-          </a:p>
-        </p:txBody>
-      </p:sp>
-      <p:sp>
-        <p:nvSpPr>
-          <p:cNvPr id="4" name="Slide Number Placeholder 3"/>
-          <p:cNvSpPr>
-            <a:spLocks noGrp="1"/>
-          </p:cNvSpPr>
-          <p:nvPr>
-            <p:ph type="sldNum" idx="5" sz="quarter"/>
-          </p:nvPr>
-        </p:nvSpPr>
-        <p:spPr/>
-      </p:sp>
-    </p:spTree>
-  </p:cSld>
-  <p:clrMapOvr>
-    <a:masterClrMapping/>
-  </p:clrMapOvr>
-</p:notes>
-</file>
-
-<file path=ppt/notesSlides/notesSlide5.xml><?xml version="1.0" encoding="utf-8"?>
-<p:notes xmlns:a="http://schemas.openxmlformats.org/drawingml/2006/main" xmlns:p="http://schemas.openxmlformats.org/presentationml/2006/main" xmlns:r="http://schemas.openxmlformats.org/officeDocument/2006/relationships">
-  <p:cSld>
-    <p:spTree>
-      <p:nvGrpSpPr>
-        <p:cNvPr id="1" name=""/>
-        <p:cNvGrpSpPr/>
-        <p:nvPr/>
-      </p:nvGrpSpPr>
-      <p:grpSpPr>
-        <a:xfrm>
-          <a:off x="0" y="0"/>
-          <a:ext cx="0" cy="0"/>
-          <a:chOff x="0" y="0"/>
-          <a:chExt cx="0" cy="0"/>
-        </a:xfrm>
-      </p:grpSpPr>
-      <p:sp>
-        <p:nvSpPr>
-          <p:cNvPr id="2" name="Slide Image Placeholder 1"/>
-          <p:cNvSpPr>
-            <a:spLocks noGrp="1"/>
-          </p:cNvSpPr>
-          <p:nvPr>
-            <p:ph type="sldImg" idx="2"/>
-          </p:nvPr>
-        </p:nvSpPr>
-        <p:spPr/>
-      </p:sp>
-      <p:sp>
-        <p:nvSpPr>
-          <p:cNvPr id="3" name="Notes Placeholder 2"/>
-          <p:cNvSpPr>
-            <a:spLocks noGrp="1"/>
-          </p:cNvSpPr>
-          <p:nvPr>
-            <p:ph type="body" idx="3" sz="quarter"/>
-          </p:nvPr>
-        </p:nvSpPr>
-        <p:spPr/>
-        <p:txBody>
-          <a:bodyPr/>
-          <a:lstStyle/>
-          <a:p>
-            <a:r>
-              <a:t>Dejar 2 minutos para que lo escriban. La diapositiva siguiente muestra el resumen.</a:t>
-            </a:r>
-          </a:p>
-        </p:txBody>
-      </p:sp>
-      <p:sp>
-        <p:nvSpPr>
-          <p:cNvPr id="4" name="Slide Number Placeholder 3"/>
-          <p:cNvSpPr>
-            <a:spLocks noGrp="1"/>
-          </p:cNvSpPr>
-          <p:nvPr>
-            <p:ph type="sldNum" idx="5" sz="quarter"/>
-          </p:nvPr>
-        </p:nvSpPr>
-        <p:spPr/>
-      </p:sp>
-    </p:spTree>
-  </p:cSld>
-  <p:clrMapOvr>
-    <a:masterClrMapping/>
-  </p:clrMapOvr>
-</p:notes>
 </file>
 
 <file path=ppt/slideLayouts/slideLayout1.xml><?xml version="1.0" encoding="utf-8"?>

--- a/curso/pptx/S42.pptx
+++ b/curso/pptx/S42.pptx
@@ -20,7 +20,6 @@
     <p:sldId id="268" r:id="rId20"/>
     <p:sldId id="269" r:id="rId21"/>
     <p:sldId id="270" r:id="rId22"/>
-    <p:sldId id="271" r:id="rId23"/>
   </p:sldIdLst>
   <p:sldSz cx="12192000" cy="6858000" type="screen4x3"/>
   <p:notesSz cx="6858000" cy="9144000"/>
@@ -3534,7 +3533,7 @@
                 </a:solidFill>
                 <a:latin typeface="Nunito Sans"/>
               </a:rPr>
-              <a:t>PENSAMIENTO CRÍTICO · SESIÓN 42 · UNIDAD 7 · NÚMEROS QUE ENGAÑAN</a:t>
+              <a:t>PENSAMIENTO CRÍTICO · SESIÓN 42 · UNIDAD 7 · EMOCIONES, CONFLICTOS Y DILEMAS</a:t>
             </a:r>
           </a:p>
         </p:txBody>
@@ -3573,7 +3572,7 @@
                 </a:solidFill>
                 <a:latin typeface="Fredoka"/>
               </a:rPr>
-              <a:t>Repaso y examen de la unidad 7</a:t>
+              <a:t>Pensar un dilema paso a paso</a:t>
             </a:r>
           </a:p>
         </p:txBody>
@@ -3612,7 +3611,7 @@
                 </a:solidFill>
                 <a:latin typeface="Nunito Sans"/>
               </a:rPr>
-              <a:t>Repasamos cómo engañan los números: porcentajes, gráficos, encuestas, correlaciones, medias y anécdotas.</a:t>
+              <a:t>Para pensar un dilema: ver qué valores chocan, buscar más salidas, mirar las consecuencias y preguntarse si aceptaría que todos hicieran lo mismo.</a:t>
             </a:r>
           </a:p>
         </p:txBody>
@@ -3677,7 +3676,7 @@
                 </a:solidFill>
                 <a:latin typeface="Nunito Sans"/>
               </a:rPr>
-              <a:t>BLOQUE 1 · REPASO DE LA UNIDAD 7</a:t>
+              <a:t>BLOQUE 2 · CASOS RESUELTOS</a:t>
             </a:r>
           </a:p>
         </p:txBody>
@@ -3716,7 +3715,7 @@
                 </a:solidFill>
                 <a:latin typeface="Fredoka"/>
               </a:rPr>
-              <a:t>Medias y anécdotas (sesión 41)</a:t>
+              <a:t>Caso 1 · La promesa</a:t>
             </a:r>
           </a:p>
         </p:txBody>
@@ -3729,14 +3728,14 @@
         </p:nvSpPr>
         <p:spPr>
           <a:xfrm>
-            <a:off x="640000" y="1650000"/>
-            <a:ext cx="5306000" cy="4400000"/>
+            <a:off x="640000" y="1600000"/>
+            <a:ext cx="10912000" cy="1100000"/>
           </a:xfrm>
           <a:prstGeom prst="rect">
             <a:avLst/>
           </a:prstGeom>
           <a:solidFill>
-            <a:srgbClr val="FBE3D2"/>
+            <a:srgbClr val="FFFFFF"/>
           </a:solidFill>
           <a:ln>
             <a:noFill/>
@@ -3772,8 +3771,8 @@
         </p:nvSpPr>
         <p:spPr>
           <a:xfrm>
-            <a:off x="840000" y="1750000"/>
-            <a:ext cx="4906000" cy="600000"/>
+            <a:off x="840000" y="1650000"/>
+            <a:ext cx="10512000" cy="1000000"/>
           </a:xfrm>
           <a:prstGeom prst="rect">
             <a:avLst/>
@@ -3781,46 +3780,7 @@
           <a:noFill/>
         </p:spPr>
         <p:txBody>
-          <a:bodyPr wrap="square">
-            <a:spAutoFit/>
-          </a:bodyPr>
-          <a:lstStyle/>
-          <a:p>
-            <a:pPr>
-              <a:spcAft>
-                <a:spcPts val="1260"/>
-              </a:spcAft>
-            </a:pPr>
-            <a:r>
-              <a:rPr sz="2800" b="1">
-                <a:solidFill>
-                  <a:srgbClr val="C2531C"/>
-                </a:solidFill>
-                <a:latin typeface="Nunito Sans"/>
-              </a:rPr>
-              <a:t>No es suficiente</a:t>
-            </a:r>
-          </a:p>
-        </p:txBody>
-      </p:sp>
-      <p:sp>
-        <p:nvSpPr>
-          <p:cNvPr id="6" name="TextBox 5"/>
-          <p:cNvSpPr txBox="1"/>
-          <p:nvPr/>
-        </p:nvSpPr>
-        <p:spPr>
-          <a:xfrm>
-            <a:off x="840000" y="2400000"/>
-            <a:ext cx="4906000" cy="3500000"/>
-          </a:xfrm>
-          <a:prstGeom prst="rect">
-            <a:avLst/>
-          </a:prstGeom>
-          <a:noFill/>
-        </p:spPr>
-        <p:txBody>
-          <a:bodyPr wrap="square">
+          <a:bodyPr wrap="square" anchor="ctr">
             <a:spAutoFit/>
           </a:bodyPr>
           <a:lstStyle/>
@@ -3833,65 +3793,294 @@
             <a:r>
               <a:rPr sz="2600" b="1">
                 <a:solidFill>
-                  <a:srgbClr val="E8793A"/>
-                </a:solidFill>
-                <a:latin typeface="Nunito Sans"/>
-              </a:rPr>
-              <a:t>• </a:t>
-            </a:r>
-            <a:r>
-              <a:rPr sz="2600" b="0">
-                <a:solidFill>
                   <a:srgbClr val="1F2A44"/>
                 </a:solidFill>
                 <a:latin typeface="Nunito Sans"/>
               </a:rPr>
-              <a:t>Una media sola, sin ver los datos</a:t>
-            </a:r>
-          </a:p>
+              <a:t>Un chico le cuenta a su mejor amigo que lleva semanas sin comer casi nada para adelgazar. Le hace prometer que no se lo dirá a nadie. (Ejemplo inventado.)</a:t>
+            </a:r>
+          </a:p>
+        </p:txBody>
+      </p:sp>
+      <p:sp>
+        <p:nvSpPr>
+          <p:cNvPr id="6" name="TextBox 5"/>
+          <p:cNvSpPr txBox="1"/>
+          <p:nvPr/>
+        </p:nvSpPr>
+        <p:spPr>
+          <a:xfrm>
+            <a:off x="640000" y="2900000"/>
+            <a:ext cx="10912000" cy="3500000"/>
+          </a:xfrm>
+          <a:prstGeom prst="rect">
+            <a:avLst/>
+          </a:prstGeom>
+          <a:noFill/>
+        </p:spPr>
+        <p:txBody>
+          <a:bodyPr wrap="square">
+            <a:spAutoFit/>
+          </a:bodyPr>
+          <a:lstStyle/>
           <a:p>
             <a:pPr>
               <a:spcAft>
-                <a:spcPts val="1170"/>
+                <a:spcPts val="1080"/>
               </a:spcAft>
             </a:pPr>
             <a:r>
-              <a:rPr sz="2600" b="1">
+              <a:rPr sz="2400" b="1">
                 <a:solidFill>
                   <a:srgbClr val="E8793A"/>
                 </a:solidFill>
                 <a:latin typeface="Nunito Sans"/>
               </a:rPr>
-              <a:t>• </a:t>
-            </a:r>
-            <a:r>
-              <a:rPr sz="2600" b="0">
+              <a:t>1. </a:t>
+            </a:r>
+            <a:r>
+              <a:rPr sz="2400" b="0">
                 <a:solidFill>
                   <a:srgbClr val="1F2A44"/>
                 </a:solidFill>
                 <a:latin typeface="Nunito Sans"/>
               </a:rPr>
-              <a:t>Una anécdota como prueba de lo que pasa en general</a:t>
-            </a:r>
-          </a:p>
-        </p:txBody>
-      </p:sp>
-      <p:sp>
-        <p:nvSpPr>
-          <p:cNvPr id="7" name="Rectangle 6"/>
+              <a:t>Valores: la </a:t>
+            </a:r>
+            <a:r>
+              <a:rPr sz="2400" b="1">
+                <a:solidFill>
+                  <a:srgbClr val="1F2A44"/>
+                </a:solidFill>
+                <a:latin typeface="Nunito Sans"/>
+              </a:rPr>
+              <a:t>lealtad</a:t>
+            </a:r>
+            <a:r>
+              <a:rPr sz="2400" b="0">
+                <a:solidFill>
+                  <a:srgbClr val="1F2A44"/>
+                </a:solidFill>
+                <a:latin typeface="Nunito Sans"/>
+              </a:rPr>
+              <a:t> (cumplir la promesa) y </a:t>
+            </a:r>
+            <a:r>
+              <a:rPr sz="2400" b="1">
+                <a:solidFill>
+                  <a:srgbClr val="1F2A44"/>
+                </a:solidFill>
+                <a:latin typeface="Nunito Sans"/>
+              </a:rPr>
+              <a:t>cuidar</a:t>
+            </a:r>
+            <a:r>
+              <a:rPr sz="2400" b="0">
+                <a:solidFill>
+                  <a:srgbClr val="1F2A44"/>
+                </a:solidFill>
+                <a:latin typeface="Nunito Sans"/>
+              </a:rPr>
+              <a:t> al amigo.</a:t>
+            </a:r>
+          </a:p>
+          <a:p>
+            <a:pPr>
+              <a:spcAft>
+                <a:spcPts val="1080"/>
+              </a:spcAft>
+            </a:pPr>
+            <a:r>
+              <a:rPr sz="2400" b="1">
+                <a:solidFill>
+                  <a:srgbClr val="E8793A"/>
+                </a:solidFill>
+                <a:latin typeface="Nunito Sans"/>
+              </a:rPr>
+              <a:t>2. </a:t>
+            </a:r>
+            <a:r>
+              <a:rPr sz="2400" b="0">
+                <a:solidFill>
+                  <a:srgbClr val="1F2A44"/>
+                </a:solidFill>
+                <a:latin typeface="Nunito Sans"/>
+              </a:rPr>
+              <a:t>Más salidas: hablar primero con él y proponerle ir juntos a contárselo a un adulto de confianza.</a:t>
+            </a:r>
+          </a:p>
+          <a:p>
+            <a:pPr>
+              <a:spcAft>
+                <a:spcPts val="1080"/>
+              </a:spcAft>
+            </a:pPr>
+            <a:r>
+              <a:rPr sz="2400" b="1">
+                <a:solidFill>
+                  <a:srgbClr val="E8793A"/>
+                </a:solidFill>
+                <a:latin typeface="Nunito Sans"/>
+              </a:rPr>
+              <a:t>3. </a:t>
+            </a:r>
+            <a:r>
+              <a:rPr sz="2400" b="0">
+                <a:solidFill>
+                  <a:srgbClr val="1F2A44"/>
+                </a:solidFill>
+                <a:latin typeface="Nunito Sans"/>
+              </a:rPr>
+              <a:t>Consecuencias: callar puede dañar su salud; contarlo puede enfadarle un tiempo.</a:t>
+            </a:r>
+          </a:p>
+          <a:p>
+            <a:pPr>
+              <a:spcAft>
+                <a:spcPts val="1080"/>
+              </a:spcAft>
+            </a:pPr>
+            <a:r>
+              <a:rPr sz="2400" b="1">
+                <a:solidFill>
+                  <a:srgbClr val="E8793A"/>
+                </a:solidFill>
+                <a:latin typeface="Nunito Sans"/>
+              </a:rPr>
+              <a:t>4. </a:t>
+            </a:r>
+            <a:r>
+              <a:rPr sz="2400" b="0">
+                <a:solidFill>
+                  <a:srgbClr val="1F2A44"/>
+                </a:solidFill>
+                <a:latin typeface="Nunito Sans"/>
+              </a:rPr>
+              <a:t>Conclusión: si hay un peligro serio, cuidar pesa más que la promesa. Contarlo a un adulto no es traicionar.</a:t>
+            </a:r>
+          </a:p>
+        </p:txBody>
+      </p:sp>
+    </p:spTree>
+  </p:cSld>
+  <p:clrMapOvr>
+    <a:masterClrMapping/>
+  </p:clrMapOvr>
+</p:sld>
+</file>
+
+<file path=ppt/slides/slide11.xml><?xml version="1.0" encoding="utf-8"?>
+<p:sld xmlns:a="http://schemas.openxmlformats.org/drawingml/2006/main" xmlns:p="http://schemas.openxmlformats.org/presentationml/2006/main" xmlns:r="http://schemas.openxmlformats.org/officeDocument/2006/relationships">
+  <p:cSld>
+    <p:bg>
+      <p:bgPr>
+        <a:solidFill>
+          <a:srgbClr val="F6C9A8"/>
+        </a:solidFill>
+        <a:effectLst/>
+      </p:bgPr>
+    </p:bg>
+    <p:spTree>
+      <p:nvGrpSpPr>
+        <p:cNvPr id="1" name=""/>
+        <p:cNvGrpSpPr/>
+        <p:nvPr/>
+      </p:nvGrpSpPr>
+      <p:grpSpPr/>
+      <p:sp>
+        <p:nvSpPr>
+          <p:cNvPr id="2" name="TextBox 1"/>
+          <p:cNvSpPr txBox="1"/>
+          <p:nvPr/>
+        </p:nvSpPr>
+        <p:spPr>
+          <a:xfrm>
+            <a:off x="640000" y="380000"/>
+            <a:ext cx="10912000" cy="420000"/>
+          </a:xfrm>
+          <a:prstGeom prst="rect">
+            <a:avLst/>
+          </a:prstGeom>
+          <a:noFill/>
+        </p:spPr>
+        <p:txBody>
+          <a:bodyPr wrap="square">
+            <a:spAutoFit/>
+          </a:bodyPr>
+          <a:lstStyle/>
+          <a:p>
+            <a:pPr>
+              <a:spcAft>
+                <a:spcPts val="630"/>
+              </a:spcAft>
+            </a:pPr>
+            <a:r>
+              <a:rPr sz="1400" b="1">
+                <a:solidFill>
+                  <a:srgbClr val="1F2A44"/>
+                </a:solidFill>
+                <a:latin typeface="Nunito Sans"/>
+              </a:rPr>
+              <a:t>CASO TRAMPA · BLOQUE 2 · CASOS RESUELTOS</a:t>
+            </a:r>
+          </a:p>
+        </p:txBody>
+      </p:sp>
+      <p:sp>
+        <p:nvSpPr>
+          <p:cNvPr id="3" name="TextBox 2"/>
+          <p:cNvSpPr txBox="1"/>
+          <p:nvPr/>
+        </p:nvSpPr>
+        <p:spPr>
+          <a:xfrm>
+            <a:off x="640000" y="760000"/>
+            <a:ext cx="10912000" cy="800000"/>
+          </a:xfrm>
+          <a:prstGeom prst="rect">
+            <a:avLst/>
+          </a:prstGeom>
+          <a:noFill/>
+        </p:spPr>
+        <p:txBody>
+          <a:bodyPr wrap="square">
+            <a:spAutoFit/>
+          </a:bodyPr>
+          <a:lstStyle/>
+          <a:p>
+            <a:pPr>
+              <a:spcAft>
+                <a:spcPts val="1710"/>
+              </a:spcAft>
+            </a:pPr>
+            <a:r>
+              <a:rPr sz="3800" b="1">
+                <a:solidFill>
+                  <a:srgbClr val="1F2A44"/>
+                </a:solidFill>
+                <a:latin typeface="Fredoka"/>
+              </a:rPr>
+              <a:t>⚠ La razón que solo vale para mí</a:t>
+            </a:r>
+          </a:p>
+        </p:txBody>
+      </p:sp>
+      <p:sp>
+        <p:nvSpPr>
+          <p:cNvPr id="4" name="Rectangle 3"/>
           <p:cNvSpPr/>
           <p:nvPr/>
         </p:nvSpPr>
         <p:spPr>
           <a:xfrm>
-            <a:off x="6246000" y="1650000"/>
-            <a:ext cx="5306000" cy="4400000"/>
+            <a:off x="640000" y="1600000"/>
+            <a:ext cx="10912000" cy="1100000"/>
           </a:xfrm>
           <a:prstGeom prst="rect">
             <a:avLst/>
           </a:prstGeom>
           <a:solidFill>
-            <a:srgbClr val="EAF0F7"/>
+            <a:srgbClr val="FBF7EF"/>
           </a:solidFill>
           <a:ln>
             <a:noFill/>
@@ -3921,14 +4110,14 @@
       </p:sp>
       <p:sp>
         <p:nvSpPr>
-          <p:cNvPr id="8" name="TextBox 7"/>
+          <p:cNvPr id="5" name="TextBox 4"/>
           <p:cNvSpPr txBox="1"/>
           <p:nvPr/>
         </p:nvSpPr>
         <p:spPr>
           <a:xfrm>
-            <a:off x="6446000" y="1750000"/>
-            <a:ext cx="4906000" cy="600000"/>
+            <a:off x="840000" y="1650000"/>
+            <a:ext cx="10512000" cy="1000000"/>
           </a:xfrm>
           <a:prstGeom prst="rect">
             <a:avLst/>
@@ -3936,46 +4125,7 @@
           <a:noFill/>
         </p:spPr>
         <p:txBody>
-          <a:bodyPr wrap="square">
-            <a:spAutoFit/>
-          </a:bodyPr>
-          <a:lstStyle/>
-          <a:p>
-            <a:pPr>
-              <a:spcAft>
-                <a:spcPts val="1260"/>
-              </a:spcAft>
-            </a:pPr>
-            <a:r>
-              <a:rPr sz="2800" b="1">
-                <a:solidFill>
-                  <a:srgbClr val="2F6FB5"/>
-                </a:solidFill>
-                <a:latin typeface="Nunito Sans"/>
-              </a:rPr>
-              <a:t>Sí ayuda</a:t>
-            </a:r>
-          </a:p>
-        </p:txBody>
-      </p:sp>
-      <p:sp>
-        <p:nvSpPr>
-          <p:cNvPr id="9" name="TextBox 8"/>
-          <p:cNvSpPr txBox="1"/>
-          <p:nvPr/>
-        </p:nvSpPr>
-        <p:spPr>
-          <a:xfrm>
-            <a:off x="6446000" y="2400000"/>
-            <a:ext cx="4906000" cy="3500000"/>
-          </a:xfrm>
-          <a:prstGeom prst="rect">
-            <a:avLst/>
-          </a:prstGeom>
-          <a:noFill/>
-        </p:spPr>
-        <p:txBody>
-          <a:bodyPr wrap="square">
+          <a:bodyPr wrap="square" anchor="ctr">
             <a:spAutoFit/>
           </a:bodyPr>
           <a:lstStyle/>
@@ -3988,85 +4138,25 @@
             <a:r>
               <a:rPr sz="2600" b="1">
                 <a:solidFill>
-                  <a:srgbClr val="E8793A"/>
-                </a:solidFill>
-                <a:latin typeface="Nunito Sans"/>
-              </a:rPr>
-              <a:t>• </a:t>
-            </a:r>
-            <a:r>
-              <a:rPr sz="2600" b="0">
-                <a:solidFill>
                   <a:srgbClr val="1F2A44"/>
                 </a:solidFill>
                 <a:latin typeface="Nunito Sans"/>
               </a:rPr>
-              <a:t>Mirar los datos por dentro y la mediana</a:t>
-            </a:r>
-          </a:p>
-          <a:p>
-            <a:pPr>
-              <a:spcAft>
-                <a:spcPts val="1170"/>
-              </a:spcAft>
-            </a:pPr>
-            <a:r>
-              <a:rPr sz="2600" b="1">
-                <a:solidFill>
-                  <a:srgbClr val="E8793A"/>
-                </a:solidFill>
-                <a:latin typeface="Nunito Sans"/>
-              </a:rPr>
-              <a:t>• </a:t>
-            </a:r>
-            <a:r>
-              <a:rPr sz="2600" b="0">
-                <a:solidFill>
-                  <a:srgbClr val="1F2A44"/>
-                </a:solidFill>
-                <a:latin typeface="Nunito Sans"/>
-              </a:rPr>
-              <a:t>Muchos casos contados bien</a:t>
-            </a:r>
-          </a:p>
-        </p:txBody>
-      </p:sp>
-    </p:spTree>
-  </p:cSld>
-  <p:clrMapOvr>
-    <a:masterClrMapping/>
-  </p:clrMapOvr>
-</p:sld>
-</file>
-
-<file path=ppt/slides/slide11.xml><?xml version="1.0" encoding="utf-8"?>
-<p:sld xmlns:a="http://schemas.openxmlformats.org/drawingml/2006/main" xmlns:p="http://schemas.openxmlformats.org/presentationml/2006/main" xmlns:r="http://schemas.openxmlformats.org/officeDocument/2006/relationships">
-  <p:cSld>
-    <p:bg>
-      <p:bgPr>
-        <a:solidFill>
-          <a:srgbClr val="1F2A44"/>
-        </a:solidFill>
-        <a:effectLst/>
-      </p:bgPr>
-    </p:bg>
-    <p:spTree>
-      <p:nvGrpSpPr>
-        <p:cNvPr id="1" name=""/>
-        <p:cNvGrpSpPr/>
-        <p:nvPr/>
-      </p:nvGrpSpPr>
-      <p:grpSpPr/>
-      <p:sp>
-        <p:nvSpPr>
-          <p:cNvPr id="2" name="TextBox 1"/>
+              <a:t>Un chico recibe 10 € de más en el cambio de un supermercado. Se los queda: «Es una empresa enorme, no le hago daño a nadie».</a:t>
+            </a:r>
+          </a:p>
+        </p:txBody>
+      </p:sp>
+      <p:sp>
+        <p:nvSpPr>
+          <p:cNvPr id="6" name="TextBox 5"/>
           <p:cNvSpPr txBox="1"/>
           <p:nvPr/>
         </p:nvSpPr>
         <p:spPr>
           <a:xfrm>
-            <a:off x="640000" y="2300000"/>
-            <a:ext cx="10912000" cy="500000"/>
+            <a:off x="640000" y="2900000"/>
+            <a:ext cx="10912000" cy="3500000"/>
           </a:xfrm>
           <a:prstGeom prst="rect">
             <a:avLst/>
@@ -4081,56 +4171,126 @@
           <a:p>
             <a:pPr>
               <a:spcAft>
-                <a:spcPts val="810"/>
+                <a:spcPts val="1080"/>
               </a:spcAft>
             </a:pPr>
             <a:r>
-              <a:rPr sz="1800" b="1">
-                <a:solidFill>
-                  <a:srgbClr val="F4B183"/>
-                </a:solidFill>
-                <a:latin typeface="Nunito Sans"/>
-              </a:rPr>
-              <a:t>BLOQUE 2</a:t>
-            </a:r>
-          </a:p>
-        </p:txBody>
-      </p:sp>
-      <p:sp>
-        <p:nvSpPr>
-          <p:cNvPr id="3" name="TextBox 2"/>
-          <p:cNvSpPr txBox="1"/>
-          <p:nvPr/>
-        </p:nvSpPr>
-        <p:spPr>
-          <a:xfrm>
-            <a:off x="640000" y="2800000"/>
-            <a:ext cx="10912000" cy="800000"/>
-          </a:xfrm>
-          <a:prstGeom prst="rect">
-            <a:avLst/>
-          </a:prstGeom>
-          <a:noFill/>
-        </p:spPr>
-        <p:txBody>
-          <a:bodyPr wrap="square">
-            <a:spAutoFit/>
-          </a:bodyPr>
-          <a:lstStyle/>
+              <a:rPr sz="2400" b="1">
+                <a:solidFill>
+                  <a:srgbClr val="E8793A"/>
+                </a:solidFill>
+                <a:latin typeface="Nunito Sans"/>
+              </a:rPr>
+              <a:t>1. </a:t>
+            </a:r>
+            <a:r>
+              <a:rPr sz="2400" b="0">
+                <a:solidFill>
+                  <a:srgbClr val="1F2A44"/>
+                </a:solidFill>
+                <a:latin typeface="Nunito Sans"/>
+              </a:rPr>
+              <a:t>Da una razón… ¿entonces es un dilema bien resuelto?</a:t>
+            </a:r>
+          </a:p>
           <a:p>
             <a:pPr>
               <a:spcAft>
-                <a:spcPts val="2160"/>
+                <a:spcPts val="1080"/>
               </a:spcAft>
             </a:pPr>
             <a:r>
-              <a:rPr sz="4800" b="1">
-                <a:solidFill>
-                  <a:srgbClr val="FBF7EF"/>
-                </a:solidFill>
-                <a:latin typeface="Fredoka"/>
-              </a:rPr>
-              <a:t>Un caso que lo mezcla todo</a:t>
+              <a:rPr sz="2400" b="1">
+                <a:solidFill>
+                  <a:srgbClr val="E8793A"/>
+                </a:solidFill>
+                <a:latin typeface="Nunito Sans"/>
+              </a:rPr>
+              <a:t>2. </a:t>
+            </a:r>
+            <a:r>
+              <a:rPr sz="2400" b="0">
+                <a:solidFill>
+                  <a:srgbClr val="1F2A44"/>
+                </a:solidFill>
+                <a:latin typeface="Nunito Sans"/>
+              </a:rPr>
+              <a:t>Parece una razón: la empresa es grande y no lo notará.</a:t>
+            </a:r>
+          </a:p>
+          <a:p>
+            <a:pPr>
+              <a:spcAft>
+                <a:spcPts val="1080"/>
+              </a:spcAft>
+            </a:pPr>
+            <a:r>
+              <a:rPr sz="2400" b="1">
+                <a:solidFill>
+                  <a:srgbClr val="E8793A"/>
+                </a:solidFill>
+                <a:latin typeface="Nunito Sans"/>
+              </a:rPr>
+              <a:t>3. </a:t>
+            </a:r>
+            <a:r>
+              <a:rPr sz="2400" b="0">
+                <a:solidFill>
+                  <a:srgbClr val="1F2A44"/>
+                </a:solidFill>
+                <a:latin typeface="Nunito Sans"/>
+              </a:rPr>
+              <a:t>Pregunta 4: ¿aceptaría él que alguien se quedara 10 € de una tienda suya? No.</a:t>
+            </a:r>
+          </a:p>
+          <a:p>
+            <a:pPr>
+              <a:spcAft>
+                <a:spcPts val="1080"/>
+              </a:spcAft>
+            </a:pPr>
+            <a:r>
+              <a:rPr sz="2400" b="1">
+                <a:solidFill>
+                  <a:srgbClr val="E8793A"/>
+                </a:solidFill>
+                <a:latin typeface="Nunito Sans"/>
+              </a:rPr>
+              <a:t>4. </a:t>
+            </a:r>
+            <a:r>
+              <a:rPr sz="2400" b="0">
+                <a:solidFill>
+                  <a:srgbClr val="1F2A44"/>
+                </a:solidFill>
+                <a:latin typeface="Nunito Sans"/>
+              </a:rPr>
+              <a:t>Además, el dinero puede faltarle a quien estaba en la caja al cerrar.</a:t>
+            </a:r>
+          </a:p>
+          <a:p>
+            <a:pPr>
+              <a:spcAft>
+                <a:spcPts val="1080"/>
+              </a:spcAft>
+            </a:pPr>
+            <a:r>
+              <a:rPr sz="2400" b="1">
+                <a:solidFill>
+                  <a:srgbClr val="E8793A"/>
+                </a:solidFill>
+                <a:latin typeface="Nunito Sans"/>
+              </a:rPr>
+              <a:t>5. </a:t>
+            </a:r>
+            <a:r>
+              <a:rPr sz="2400" b="0">
+                <a:solidFill>
+                  <a:srgbClr val="1F2A44"/>
+                </a:solidFill>
+                <a:latin typeface="Nunito Sans"/>
+              </a:rPr>
+              <a:t>Conclusión: una razón que solo vale cuando me conviene es una excusa. No había dilema: había ganas de quedárselo.</a:t>
             </a:r>
           </a:p>
         </p:txBody>
@@ -4195,7 +4355,7 @@
                 </a:solidFill>
                 <a:latin typeface="Nunito Sans"/>
               </a:rPr>
-              <a:t>BLOQUE 2 · UN CASO QUE LO MEZCLA TODO</a:t>
+              <a:t>LO DE HOY EN TRES LÍNEAS</a:t>
             </a:r>
           </a:p>
         </p:txBody>
@@ -4234,64 +4394,21 @@
                 </a:solidFill>
                 <a:latin typeface="Fredoka"/>
               </a:rPr>
-              <a:t>Caso · La almohada Nube</a:t>
-            </a:r>
-          </a:p>
-        </p:txBody>
-      </p:sp>
-      <p:sp>
-        <p:nvSpPr>
-          <p:cNvPr id="4" name="Rectangle 3"/>
-          <p:cNvSpPr/>
-          <p:nvPr/>
-        </p:nvSpPr>
-        <p:spPr>
-          <a:xfrm>
-            <a:off x="640000" y="1600000"/>
-            <a:ext cx="10912000" cy="1100000"/>
-          </a:xfrm>
-          <a:prstGeom prst="rect">
-            <a:avLst/>
-          </a:prstGeom>
-          <a:solidFill>
-            <a:srgbClr val="FFFFFF"/>
-          </a:solidFill>
-          <a:ln>
-            <a:noFill/>
-          </a:ln>
-        </p:spPr>
-        <p:style>
-          <a:lnRef idx="1">
-            <a:schemeClr val="accent1"/>
-          </a:lnRef>
-          <a:fillRef idx="3">
-            <a:schemeClr val="accent1"/>
-          </a:fillRef>
-          <a:effectRef idx="2">
-            <a:schemeClr val="accent1"/>
-          </a:effectRef>
-          <a:fontRef idx="minor">
-            <a:schemeClr val="lt1"/>
-          </a:fontRef>
-        </p:style>
-        <p:txBody>
-          <a:bodyPr rtlCol="0" anchor="ctr"/>
-          <a:lstStyle/>
-          <a:p>
-            <a:pPr algn="ctr"/>
-          </a:p>
-        </p:txBody>
-      </p:sp>
-      <p:sp>
-        <p:nvSpPr>
-          <p:cNvPr id="5" name="TextBox 4"/>
+              <a:t>Escríbelo tú primero, sin mirar</a:t>
+            </a:r>
+          </a:p>
+        </p:txBody>
+      </p:sp>
+      <p:sp>
+        <p:nvSpPr>
+          <p:cNvPr id="4" name="TextBox 3"/>
           <p:cNvSpPr txBox="1"/>
           <p:nvPr/>
         </p:nvSpPr>
         <p:spPr>
           <a:xfrm>
-            <a:off x="840000" y="1650000"/>
-            <a:ext cx="10512000" cy="1000000"/>
+            <a:off x="640000" y="1800000"/>
+            <a:ext cx="10912000" cy="1500000"/>
           </a:xfrm>
           <a:prstGeom prst="rect">
             <a:avLst/>
@@ -4299,7 +4416,7 @@
           <a:noFill/>
         </p:spPr>
         <p:txBody>
-          <a:bodyPr wrap="square" anchor="ctr">
+          <a:bodyPr wrap="square">
             <a:spAutoFit/>
           </a:bodyPr>
           <a:lstStyle/>
@@ -4310,136 +4427,13 @@
               </a:spcAft>
             </a:pPr>
             <a:r>
-              <a:rPr sz="2600" b="1">
-                <a:solidFill>
-                  <a:srgbClr val="1F2A44"/>
-                </a:solidFill>
-                <a:latin typeface="Nunito Sans"/>
-              </a:rPr>
-              <a:t>Anuncio inventado: «¡El 80 % duerme mejor con la almohada Nube!». En letra pequeña: «Encuesta a 10 clientes». El gráfico tiene el eje de 70 a 80.</a:t>
-            </a:r>
-          </a:p>
-        </p:txBody>
-      </p:sp>
-      <p:sp>
-        <p:nvSpPr>
-          <p:cNvPr id="6" name="TextBox 5"/>
-          <p:cNvSpPr txBox="1"/>
-          <p:nvPr/>
-        </p:nvSpPr>
-        <p:spPr>
-          <a:xfrm>
-            <a:off x="640000" y="2900000"/>
-            <a:ext cx="10912000" cy="3500000"/>
-          </a:xfrm>
-          <a:prstGeom prst="rect">
-            <a:avLst/>
-          </a:prstGeom>
-          <a:noFill/>
-        </p:spPr>
-        <p:txBody>
-          <a:bodyPr wrap="square">
-            <a:spAutoFit/>
-          </a:bodyPr>
-          <a:lstStyle/>
-          <a:p>
-            <a:pPr>
-              <a:spcAft>
-                <a:spcPts val="1080"/>
-              </a:spcAft>
-            </a:pPr>
-            <a:r>
-              <a:rPr sz="2400" b="1">
-                <a:solidFill>
-                  <a:srgbClr val="E8793A"/>
-                </a:solidFill>
-                <a:latin typeface="Nunito Sans"/>
-              </a:rPr>
-              <a:t>1. </a:t>
-            </a:r>
-            <a:r>
-              <a:rPr sz="2400" b="0">
-                <a:solidFill>
-                  <a:srgbClr val="1F2A44"/>
-                </a:solidFill>
-                <a:latin typeface="Nunito Sans"/>
-              </a:rPr>
-              <a:t>Porcentaje: el 80 % de 10 son solo 8 personas.</a:t>
-            </a:r>
-          </a:p>
-          <a:p>
-            <a:pPr>
-              <a:spcAft>
-                <a:spcPts val="1080"/>
-              </a:spcAft>
-            </a:pPr>
-            <a:r>
-              <a:rPr sz="2400" b="1">
-                <a:solidFill>
-                  <a:srgbClr val="E8793A"/>
-                </a:solidFill>
-                <a:latin typeface="Nunito Sans"/>
-              </a:rPr>
-              <a:t>2. </a:t>
-            </a:r>
-            <a:r>
-              <a:rPr sz="2400" b="0">
-                <a:solidFill>
-                  <a:srgbClr val="1F2A44"/>
-                </a:solidFill>
-                <a:latin typeface="Nunito Sans"/>
-              </a:rPr>
-              <a:t>Muestra: 10 clientes que ya compraron la almohada. Pequeña y sesgada.</a:t>
-            </a:r>
-          </a:p>
-          <a:p>
-            <a:pPr>
-              <a:spcAft>
-                <a:spcPts val="1080"/>
-              </a:spcAft>
-            </a:pPr>
-            <a:r>
-              <a:rPr sz="2400" b="1">
-                <a:solidFill>
-                  <a:srgbClr val="E8793A"/>
-                </a:solidFill>
-                <a:latin typeface="Nunito Sans"/>
-              </a:rPr>
-              <a:t>3. </a:t>
-            </a:r>
-            <a:r>
-              <a:rPr sz="2400" b="0">
-                <a:solidFill>
-                  <a:srgbClr val="1F2A44"/>
-                </a:solidFill>
-                <a:latin typeface="Nunito Sans"/>
-              </a:rPr>
-              <a:t>Gráfico: son barras y el eje empieza en 70, así que cualquier diferencia parece enorme.</a:t>
-            </a:r>
-          </a:p>
-          <a:p>
-            <a:pPr>
-              <a:spcAft>
-                <a:spcPts val="1080"/>
-              </a:spcAft>
-            </a:pPr>
-            <a:r>
-              <a:rPr sz="2400" b="1">
-                <a:solidFill>
-                  <a:srgbClr val="E8793A"/>
-                </a:solidFill>
-                <a:latin typeface="Nunito Sans"/>
-              </a:rPr>
-              <a:t>4. </a:t>
-            </a:r>
-            <a:r>
-              <a:rPr sz="2400" b="0">
-                <a:solidFill>
-                  <a:srgbClr val="1F2A44"/>
-                </a:solidFill>
-                <a:latin typeface="Nunito Sans"/>
-              </a:rPr>
-              <a:t>Conclusión: tres trucos de números en un solo anuncio. Todavía no me convence.</a:t>
+              <a:rPr sz="2600" b="0">
+                <a:solidFill>
+                  <a:srgbClr val="4A5568"/>
+                </a:solidFill>
+                <a:latin typeface="Nunito Sans"/>
+              </a:rPr>
+              <a:t>Dos minutos. Después lo comparamos.</a:t>
             </a:r>
           </a:p>
         </p:txBody>
@@ -4453,340 +4447,6 @@
 </file>
 
 <file path=ppt/slides/slide13.xml><?xml version="1.0" encoding="utf-8"?>
-<p:sld xmlns:a="http://schemas.openxmlformats.org/drawingml/2006/main" xmlns:p="http://schemas.openxmlformats.org/presentationml/2006/main" xmlns:r="http://schemas.openxmlformats.org/officeDocument/2006/relationships">
-  <p:cSld>
-    <p:bg>
-      <p:bgPr>
-        <a:solidFill>
-          <a:srgbClr val="F6C9A8"/>
-        </a:solidFill>
-        <a:effectLst/>
-      </p:bgPr>
-    </p:bg>
-    <p:spTree>
-      <p:nvGrpSpPr>
-        <p:cNvPr id="1" name=""/>
-        <p:cNvGrpSpPr/>
-        <p:nvPr/>
-      </p:nvGrpSpPr>
-      <p:grpSpPr/>
-      <p:sp>
-        <p:nvSpPr>
-          <p:cNvPr id="2" name="TextBox 1"/>
-          <p:cNvSpPr txBox="1"/>
-          <p:nvPr/>
-        </p:nvSpPr>
-        <p:spPr>
-          <a:xfrm>
-            <a:off x="640000" y="380000"/>
-            <a:ext cx="10912000" cy="420000"/>
-          </a:xfrm>
-          <a:prstGeom prst="rect">
-            <a:avLst/>
-          </a:prstGeom>
-          <a:noFill/>
-        </p:spPr>
-        <p:txBody>
-          <a:bodyPr wrap="square">
-            <a:spAutoFit/>
-          </a:bodyPr>
-          <a:lstStyle/>
-          <a:p>
-            <a:pPr>
-              <a:spcAft>
-                <a:spcPts val="630"/>
-              </a:spcAft>
-            </a:pPr>
-            <a:r>
-              <a:rPr sz="1400" b="1">
-                <a:solidFill>
-                  <a:srgbClr val="1F2A44"/>
-                </a:solidFill>
-                <a:latin typeface="Nunito Sans"/>
-              </a:rPr>
-              <a:t>CASO TRAMPA · BLOQUE 2 · UN CASO QUE LO MEZCLA TODO</a:t>
-            </a:r>
-          </a:p>
-        </p:txBody>
-      </p:sp>
-      <p:sp>
-        <p:nvSpPr>
-          <p:cNvPr id="3" name="TextBox 2"/>
-          <p:cNvSpPr txBox="1"/>
-          <p:nvPr/>
-        </p:nvSpPr>
-        <p:spPr>
-          <a:xfrm>
-            <a:off x="640000" y="760000"/>
-            <a:ext cx="10912000" cy="800000"/>
-          </a:xfrm>
-          <a:prstGeom prst="rect">
-            <a:avLst/>
-          </a:prstGeom>
-          <a:noFill/>
-        </p:spPr>
-        <p:txBody>
-          <a:bodyPr wrap="square">
-            <a:spAutoFit/>
-          </a:bodyPr>
-          <a:lstStyle/>
-          <a:p>
-            <a:pPr>
-              <a:spcAft>
-                <a:spcPts val="1710"/>
-              </a:spcAft>
-            </a:pPr>
-            <a:r>
-              <a:rPr sz="3800" b="1">
-                <a:solidFill>
-                  <a:srgbClr val="1F2A44"/>
-                </a:solidFill>
-                <a:latin typeface="Fredoka"/>
-              </a:rPr>
-              <a:t>⚠ «Solo» 1 de cada 1.000</a:t>
-            </a:r>
-          </a:p>
-        </p:txBody>
-      </p:sp>
-      <p:sp>
-        <p:nvSpPr>
-          <p:cNvPr id="4" name="Rectangle 3"/>
-          <p:cNvSpPr/>
-          <p:nvPr/>
-        </p:nvSpPr>
-        <p:spPr>
-          <a:xfrm>
-            <a:off x="640000" y="1600000"/>
-            <a:ext cx="10912000" cy="1100000"/>
-          </a:xfrm>
-          <a:prstGeom prst="rect">
-            <a:avLst/>
-          </a:prstGeom>
-          <a:solidFill>
-            <a:srgbClr val="FBF7EF"/>
-          </a:solidFill>
-          <a:ln>
-            <a:noFill/>
-          </a:ln>
-        </p:spPr>
-        <p:style>
-          <a:lnRef idx="1">
-            <a:schemeClr val="accent1"/>
-          </a:lnRef>
-          <a:fillRef idx="3">
-            <a:schemeClr val="accent1"/>
-          </a:fillRef>
-          <a:effectRef idx="2">
-            <a:schemeClr val="accent1"/>
-          </a:effectRef>
-          <a:fontRef idx="minor">
-            <a:schemeClr val="lt1"/>
-          </a:fontRef>
-        </p:style>
-        <p:txBody>
-          <a:bodyPr rtlCol="0" anchor="ctr"/>
-          <a:lstStyle/>
-          <a:p>
-            <a:pPr algn="ctr"/>
-          </a:p>
-        </p:txBody>
-      </p:sp>
-      <p:sp>
-        <p:nvSpPr>
-          <p:cNvPr id="5" name="TextBox 4"/>
-          <p:cNvSpPr txBox="1"/>
-          <p:nvPr/>
-        </p:nvSpPr>
-        <p:spPr>
-          <a:xfrm>
-            <a:off x="840000" y="1650000"/>
-            <a:ext cx="10512000" cy="1000000"/>
-          </a:xfrm>
-          <a:prstGeom prst="rect">
-            <a:avLst/>
-          </a:prstGeom>
-          <a:noFill/>
-        </p:spPr>
-        <p:txBody>
-          <a:bodyPr wrap="square" anchor="ctr">
-            <a:spAutoFit/>
-          </a:bodyPr>
-          <a:lstStyle/>
-          <a:p>
-            <a:pPr>
-              <a:spcAft>
-                <a:spcPts val="1170"/>
-              </a:spcAft>
-            </a:pPr>
-            <a:r>
-              <a:rPr sz="2600" b="1">
-                <a:solidFill>
-                  <a:srgbClr val="1F2A44"/>
-                </a:solidFill>
-                <a:latin typeface="Nunito Sans"/>
-              </a:rPr>
-              <a:t>Una vacuna baja las muertes por una enfermedad de 2 de cada 1.000 a 1 de cada 1.000. Alguien dice: «Solo 1 de cada 1.000: casi nada». (Ejemplo inventado.)</a:t>
-            </a:r>
-          </a:p>
-        </p:txBody>
-      </p:sp>
-      <p:sp>
-        <p:nvSpPr>
-          <p:cNvPr id="6" name="TextBox 5"/>
-          <p:cNvSpPr txBox="1"/>
-          <p:nvPr/>
-        </p:nvSpPr>
-        <p:spPr>
-          <a:xfrm>
-            <a:off x="640000" y="2900000"/>
-            <a:ext cx="10912000" cy="3500000"/>
-          </a:xfrm>
-          <a:prstGeom prst="rect">
-            <a:avLst/>
-          </a:prstGeom>
-          <a:noFill/>
-        </p:spPr>
-        <p:txBody>
-          <a:bodyPr wrap="square">
-            <a:spAutoFit/>
-          </a:bodyPr>
-          <a:lstStyle/>
-          <a:p>
-            <a:pPr>
-              <a:spcAft>
-                <a:spcPts val="1080"/>
-              </a:spcAft>
-            </a:pPr>
-            <a:r>
-              <a:rPr sz="2400" b="1">
-                <a:solidFill>
-                  <a:srgbClr val="E8793A"/>
-                </a:solidFill>
-                <a:latin typeface="Nunito Sans"/>
-              </a:rPr>
-              <a:t>1. </a:t>
-            </a:r>
-            <a:r>
-              <a:rPr sz="2400" b="0">
-                <a:solidFill>
-                  <a:srgbClr val="1F2A44"/>
-                </a:solidFill>
-                <a:latin typeface="Nunito Sans"/>
-              </a:rPr>
-              <a:t>¿Es una mejora tan pequeña que no importa?</a:t>
-            </a:r>
-          </a:p>
-          <a:p>
-            <a:pPr>
-              <a:spcAft>
-                <a:spcPts val="1080"/>
-              </a:spcAft>
-            </a:pPr>
-            <a:r>
-              <a:rPr sz="2400" b="1">
-                <a:solidFill>
-                  <a:srgbClr val="E8793A"/>
-                </a:solidFill>
-                <a:latin typeface="Nunito Sans"/>
-              </a:rPr>
-              <a:t>2. </a:t>
-            </a:r>
-            <a:r>
-              <a:rPr sz="2400" b="0">
-                <a:solidFill>
-                  <a:srgbClr val="1F2A44"/>
-                </a:solidFill>
-                <a:latin typeface="Nunito Sans"/>
-              </a:rPr>
-              <a:t>En cifra absoluta, 1 de cada 1.000 parece poco.</a:t>
-            </a:r>
-          </a:p>
-          <a:p>
-            <a:pPr>
-              <a:spcAft>
-                <a:spcPts val="1080"/>
-              </a:spcAft>
-            </a:pPr>
-            <a:r>
-              <a:rPr sz="2400" b="1">
-                <a:solidFill>
-                  <a:srgbClr val="E8793A"/>
-                </a:solidFill>
-                <a:latin typeface="Nunito Sans"/>
-              </a:rPr>
-              <a:t>3. </a:t>
-            </a:r>
-            <a:r>
-              <a:rPr sz="2400" b="0">
-                <a:solidFill>
-                  <a:srgbClr val="1F2A44"/>
-                </a:solidFill>
-                <a:latin typeface="Nunito Sans"/>
-              </a:rPr>
-              <a:t>Pero si se vacuna un millón de personas, son 1.000 muertes menos.</a:t>
-            </a:r>
-          </a:p>
-          <a:p>
-            <a:pPr>
-              <a:spcAft>
-                <a:spcPts val="1080"/>
-              </a:spcAft>
-            </a:pPr>
-            <a:r>
-              <a:rPr sz="2400" b="1">
-                <a:solidFill>
-                  <a:srgbClr val="E8793A"/>
-                </a:solidFill>
-                <a:latin typeface="Nunito Sans"/>
-              </a:rPr>
-              <a:t>4. </a:t>
-            </a:r>
-            <a:r>
-              <a:rPr sz="2400" b="0">
-                <a:solidFill>
-                  <a:srgbClr val="1F2A44"/>
-                </a:solidFill>
-                <a:latin typeface="Nunito Sans"/>
-              </a:rPr>
-              <a:t>«Casi nada» también puede engañar: depende de cuántas personas y de lo grave que sea.</a:t>
-            </a:r>
-          </a:p>
-          <a:p>
-            <a:pPr>
-              <a:spcAft>
-                <a:spcPts val="1080"/>
-              </a:spcAft>
-            </a:pPr>
-            <a:r>
-              <a:rPr sz="2400" b="1">
-                <a:solidFill>
-                  <a:srgbClr val="E8793A"/>
-                </a:solidFill>
-                <a:latin typeface="Nunito Sans"/>
-              </a:rPr>
-              <a:t>5. </a:t>
-            </a:r>
-            <a:r>
-              <a:rPr sz="2400" b="0">
-                <a:solidFill>
-                  <a:srgbClr val="1F2A44"/>
-                </a:solidFill>
-                <a:latin typeface="Nunito Sans"/>
-              </a:rPr>
-              <a:t>Conclusión: una cifra pequeña no siempre es poco importante. Pregunto de cuántos y qué está en juego.</a:t>
-            </a:r>
-          </a:p>
-        </p:txBody>
-      </p:sp>
-    </p:spTree>
-  </p:cSld>
-  <p:clrMapOvr>
-    <a:masterClrMapping/>
-  </p:clrMapOvr>
-</p:sld>
-</file>
-
-<file path=ppt/slides/slide14.xml><?xml version="1.0" encoding="utf-8"?>
 <p:sld xmlns:a="http://schemas.openxmlformats.org/drawingml/2006/main" xmlns:p="http://schemas.openxmlformats.org/presentationml/2006/main" xmlns:r="http://schemas.openxmlformats.org/officeDocument/2006/relationships">
   <p:cSld>
     <p:bg>
@@ -4851,8 +4511,8 @@
         </p:nvSpPr>
         <p:spPr>
           <a:xfrm>
-            <a:off x="640000" y="760000"/>
-            <a:ext cx="10912000" cy="800000"/>
+            <a:off x="640000" y="1300000"/>
+            <a:ext cx="10912000" cy="4800000"/>
           </a:xfrm>
           <a:prstGeom prst="rect">
             <a:avLst/>
@@ -4867,56 +4527,76 @@
           <a:p>
             <a:pPr>
               <a:spcAft>
-                <a:spcPts val="1710"/>
+                <a:spcPts val="1350"/>
               </a:spcAft>
             </a:pPr>
             <a:r>
-              <a:rPr sz="3800" b="1">
+              <a:rPr sz="3000" b="1">
+                <a:solidFill>
+                  <a:srgbClr val="E8793A"/>
+                </a:solidFill>
+                <a:latin typeface="Nunito Sans"/>
+              </a:rPr>
+              <a:t>1. </a:t>
+            </a:r>
+            <a:r>
+              <a:rPr sz="3000" b="0">
                 <a:solidFill>
                   <a:srgbClr val="1F2A44"/>
                 </a:solidFill>
-                <a:latin typeface="Fredoka"/>
-              </a:rPr>
-              <a:t>Escríbelo tú primero, sin mirar</a:t>
-            </a:r>
-          </a:p>
-        </p:txBody>
-      </p:sp>
-      <p:sp>
-        <p:nvSpPr>
-          <p:cNvPr id="4" name="TextBox 3"/>
-          <p:cNvSpPr txBox="1"/>
-          <p:nvPr/>
-        </p:nvSpPr>
-        <p:spPr>
-          <a:xfrm>
-            <a:off x="640000" y="1800000"/>
-            <a:ext cx="10912000" cy="1500000"/>
-          </a:xfrm>
-          <a:prstGeom prst="rect">
-            <a:avLst/>
-          </a:prstGeom>
-          <a:noFill/>
-        </p:spPr>
-        <p:txBody>
-          <a:bodyPr wrap="square">
-            <a:spAutoFit/>
-          </a:bodyPr>
-          <a:lstStyle/>
+                <a:latin typeface="Nunito Sans"/>
+              </a:rPr>
+              <a:t>Para pensar un dilema: qué valores chocan, qué otras salidas hay y qué consecuencias tiene cada una.</a:t>
+            </a:r>
+          </a:p>
           <a:p>
             <a:pPr>
               <a:spcAft>
-                <a:spcPts val="1170"/>
+                <a:spcPts val="1350"/>
               </a:spcAft>
             </a:pPr>
             <a:r>
-              <a:rPr sz="2600" b="0">
-                <a:solidFill>
-                  <a:srgbClr val="4A5568"/>
-                </a:solidFill>
-                <a:latin typeface="Nunito Sans"/>
-              </a:rPr>
-              <a:t>Dos minutos. Después lo comparamos.</a:t>
+              <a:rPr sz="3000" b="1">
+                <a:solidFill>
+                  <a:srgbClr val="E8793A"/>
+                </a:solidFill>
+                <a:latin typeface="Nunito Sans"/>
+              </a:rPr>
+              <a:t>2. </a:t>
+            </a:r>
+            <a:r>
+              <a:rPr sz="3000" b="0">
+                <a:solidFill>
+                  <a:srgbClr val="1F2A44"/>
+                </a:solidFill>
+                <a:latin typeface="Nunito Sans"/>
+              </a:rPr>
+              <a:t>Una buena razón valdría también si yo estuviera en el lugar del otro.</a:t>
+            </a:r>
+          </a:p>
+          <a:p>
+            <a:pPr>
+              <a:spcAft>
+                <a:spcPts val="1350"/>
+              </a:spcAft>
+            </a:pPr>
+            <a:r>
+              <a:rPr sz="3000" b="1">
+                <a:solidFill>
+                  <a:srgbClr val="E8793A"/>
+                </a:solidFill>
+                <a:latin typeface="Nunito Sans"/>
+              </a:rPr>
+              <a:t>3. </a:t>
+            </a:r>
+            <a:r>
+              <a:rPr sz="3000" b="0">
+                <a:solidFill>
+                  <a:srgbClr val="1F2A44"/>
+                </a:solidFill>
+                <a:latin typeface="Nunito Sans"/>
+              </a:rPr>
+              <a:t>Si hay un peligro serio, contarlo a un adulto no es traicionar.</a:t>
             </a:r>
           </a:p>
         </p:txBody>
@@ -4929,170 +4609,7 @@
 </p:sld>
 </file>
 
-<file path=ppt/slides/slide15.xml><?xml version="1.0" encoding="utf-8"?>
-<p:sld xmlns:a="http://schemas.openxmlformats.org/drawingml/2006/main" xmlns:p="http://schemas.openxmlformats.org/presentationml/2006/main" xmlns:r="http://schemas.openxmlformats.org/officeDocument/2006/relationships">
-  <p:cSld>
-    <p:bg>
-      <p:bgPr>
-        <a:solidFill>
-          <a:srgbClr val="FBF7EF"/>
-        </a:solidFill>
-        <a:effectLst/>
-      </p:bgPr>
-    </p:bg>
-    <p:spTree>
-      <p:nvGrpSpPr>
-        <p:cNvPr id="1" name=""/>
-        <p:cNvGrpSpPr/>
-        <p:nvPr/>
-      </p:nvGrpSpPr>
-      <p:grpSpPr/>
-      <p:sp>
-        <p:nvSpPr>
-          <p:cNvPr id="2" name="TextBox 1"/>
-          <p:cNvSpPr txBox="1"/>
-          <p:nvPr/>
-        </p:nvSpPr>
-        <p:spPr>
-          <a:xfrm>
-            <a:off x="640000" y="380000"/>
-            <a:ext cx="10912000" cy="420000"/>
-          </a:xfrm>
-          <a:prstGeom prst="rect">
-            <a:avLst/>
-          </a:prstGeom>
-          <a:noFill/>
-        </p:spPr>
-        <p:txBody>
-          <a:bodyPr wrap="square">
-            <a:spAutoFit/>
-          </a:bodyPr>
-          <a:lstStyle/>
-          <a:p>
-            <a:pPr>
-              <a:spcAft>
-                <a:spcPts val="630"/>
-              </a:spcAft>
-            </a:pPr>
-            <a:r>
-              <a:rPr sz="1400" b="1">
-                <a:solidFill>
-                  <a:srgbClr val="E8793A"/>
-                </a:solidFill>
-                <a:latin typeface="Nunito Sans"/>
-              </a:rPr>
-              <a:t>LO DE HOY EN TRES LÍNEAS</a:t>
-            </a:r>
-          </a:p>
-        </p:txBody>
-      </p:sp>
-      <p:sp>
-        <p:nvSpPr>
-          <p:cNvPr id="3" name="TextBox 2"/>
-          <p:cNvSpPr txBox="1"/>
-          <p:nvPr/>
-        </p:nvSpPr>
-        <p:spPr>
-          <a:xfrm>
-            <a:off x="640000" y="1300000"/>
-            <a:ext cx="10912000" cy="4800000"/>
-          </a:xfrm>
-          <a:prstGeom prst="rect">
-            <a:avLst/>
-          </a:prstGeom>
-          <a:noFill/>
-        </p:spPr>
-        <p:txBody>
-          <a:bodyPr wrap="square">
-            <a:spAutoFit/>
-          </a:bodyPr>
-          <a:lstStyle/>
-          <a:p>
-            <a:pPr>
-              <a:spcAft>
-                <a:spcPts val="1350"/>
-              </a:spcAft>
-            </a:pPr>
-            <a:r>
-              <a:rPr sz="3000" b="1">
-                <a:solidFill>
-                  <a:srgbClr val="E8793A"/>
-                </a:solidFill>
-                <a:latin typeface="Nunito Sans"/>
-              </a:rPr>
-              <a:t>1. </a:t>
-            </a:r>
-            <a:r>
-              <a:rPr sz="3000" b="0">
-                <a:solidFill>
-                  <a:srgbClr val="1F2A44"/>
-                </a:solidFill>
-                <a:latin typeface="Nunito Sans"/>
-              </a:rPr>
-              <a:t>Ante un porcentaje, pregunta siempre «¿de cuántos?» y «¿de qué?».</a:t>
-            </a:r>
-          </a:p>
-          <a:p>
-            <a:pPr>
-              <a:spcAft>
-                <a:spcPts val="1350"/>
-              </a:spcAft>
-            </a:pPr>
-            <a:r>
-              <a:rPr sz="3000" b="1">
-                <a:solidFill>
-                  <a:srgbClr val="E8793A"/>
-                </a:solidFill>
-                <a:latin typeface="Nunito Sans"/>
-              </a:rPr>
-              <a:t>2. </a:t>
-            </a:r>
-            <a:r>
-              <a:rPr sz="3000" b="0">
-                <a:solidFill>
-                  <a:srgbClr val="1F2A44"/>
-                </a:solidFill>
-                <a:latin typeface="Nunito Sans"/>
-              </a:rPr>
-              <a:t>Mira dónde empieza el eje del gráfico y a quién preguntó la encuesta.</a:t>
-            </a:r>
-          </a:p>
-          <a:p>
-            <a:pPr>
-              <a:spcAft>
-                <a:spcPts val="1350"/>
-              </a:spcAft>
-            </a:pPr>
-            <a:r>
-              <a:rPr sz="3000" b="1">
-                <a:solidFill>
-                  <a:srgbClr val="E8793A"/>
-                </a:solidFill>
-                <a:latin typeface="Nunito Sans"/>
-              </a:rPr>
-              <a:t>3. </a:t>
-            </a:r>
-            <a:r>
-              <a:rPr sz="3000" b="0">
-                <a:solidFill>
-                  <a:srgbClr val="1F2A44"/>
-                </a:solidFill>
-                <a:latin typeface="Nunito Sans"/>
-              </a:rPr>
-              <a:t>Correlación no es causa, la media esconde y una anécdota no es un dato.</a:t>
-            </a:r>
-          </a:p>
-        </p:txBody>
-      </p:sp>
-    </p:spTree>
-  </p:cSld>
-  <p:clrMapOvr>
-    <a:masterClrMapping/>
-  </p:clrMapOvr>
-</p:sld>
-</file>
-
-<file path=ppt/slides/slide16.xml><?xml version="1.0" encoding="utf-8"?>
+<file path=ppt/slides/slide14.xml><?xml version="1.0" encoding="utf-8"?>
 <p:sld xmlns:a="http://schemas.openxmlformats.org/drawingml/2006/main" xmlns:p="http://schemas.openxmlformats.org/presentationml/2006/main" xmlns:r="http://schemas.openxmlformats.org/officeDocument/2006/relationships">
   <p:cSld>
     <p:bg>
@@ -5144,6 +4661,149 @@
                 </a:solidFill>
                 <a:latin typeface="Nunito Sans"/>
               </a:rPr>
+              <a:t>VÍDEO</a:t>
+            </a:r>
+          </a:p>
+        </p:txBody>
+      </p:sp>
+      <p:sp>
+        <p:nvSpPr>
+          <p:cNvPr id="3" name="TextBox 2"/>
+          <p:cNvSpPr txBox="1"/>
+          <p:nvPr/>
+        </p:nvSpPr>
+        <p:spPr>
+          <a:xfrm>
+            <a:off x="640000" y="760000"/>
+            <a:ext cx="10912000" cy="800000"/>
+          </a:xfrm>
+          <a:prstGeom prst="rect">
+            <a:avLst/>
+          </a:prstGeom>
+          <a:noFill/>
+        </p:spPr>
+        <p:txBody>
+          <a:bodyPr wrap="square">
+            <a:spAutoFit/>
+          </a:bodyPr>
+          <a:lstStyle/>
+          <a:p>
+            <a:pPr>
+              <a:spcAft>
+                <a:spcPts val="1620"/>
+              </a:spcAft>
+            </a:pPr>
+            <a:r>
+              <a:rPr sz="3600" b="1">
+                <a:solidFill>
+                  <a:srgbClr val="FBF7EF"/>
+                </a:solidFill>
+                <a:latin typeface="Fredoka"/>
+              </a:rPr>
+              <a:t>Cómo pensar un dilema ético paso a paso</a:t>
+            </a:r>
+          </a:p>
+        </p:txBody>
+      </p:sp>
+      <p:sp>
+        <p:nvSpPr>
+          <p:cNvPr id="4" name="TextBox 3"/>
+          <p:cNvSpPr txBox="1"/>
+          <p:nvPr/>
+        </p:nvSpPr>
+        <p:spPr>
+          <a:xfrm>
+            <a:off x="640000" y="2200000"/>
+            <a:ext cx="10912000" cy="2000000"/>
+          </a:xfrm>
+          <a:prstGeom prst="rect">
+            <a:avLst/>
+          </a:prstGeom>
+          <a:noFill/>
+        </p:spPr>
+        <p:txBody>
+          <a:bodyPr wrap="square">
+            <a:spAutoFit/>
+          </a:bodyPr>
+          <a:lstStyle/>
+          <a:p>
+            <a:pPr>
+              <a:spcAft>
+                <a:spcPts val="1080"/>
+              </a:spcAft>
+            </a:pPr>
+            <a:r>
+              <a:rPr sz="2400" b="0">
+                <a:solidFill>
+                  <a:srgbClr val="C9D3E6"/>
+                </a:solidFill>
+                <a:latin typeface="Nunito Sans"/>
+              </a:rPr>
+              <a:t>Ver a alguien pensar un dilema en voz alta, mirando valores, salidas y consecuencias.</a:t>
+            </a:r>
+          </a:p>
+        </p:txBody>
+      </p:sp>
+    </p:spTree>
+  </p:cSld>
+  <p:clrMapOvr>
+    <a:masterClrMapping/>
+  </p:clrMapOvr>
+</p:sld>
+</file>
+
+<file path=ppt/slides/slide15.xml><?xml version="1.0" encoding="utf-8"?>
+<p:sld xmlns:a="http://schemas.openxmlformats.org/drawingml/2006/main" xmlns:p="http://schemas.openxmlformats.org/presentationml/2006/main" xmlns:r="http://schemas.openxmlformats.org/officeDocument/2006/relationships">
+  <p:cSld>
+    <p:bg>
+      <p:bgPr>
+        <a:solidFill>
+          <a:srgbClr val="1F2A44"/>
+        </a:solidFill>
+        <a:effectLst/>
+      </p:bgPr>
+    </p:bg>
+    <p:spTree>
+      <p:nvGrpSpPr>
+        <p:cNvPr id="1" name=""/>
+        <p:cNvGrpSpPr/>
+        <p:nvPr/>
+      </p:nvGrpSpPr>
+      <p:grpSpPr/>
+      <p:sp>
+        <p:nvSpPr>
+          <p:cNvPr id="2" name="TextBox 1"/>
+          <p:cNvSpPr txBox="1"/>
+          <p:nvPr/>
+        </p:nvSpPr>
+        <p:spPr>
+          <a:xfrm>
+            <a:off x="640000" y="380000"/>
+            <a:ext cx="10912000" cy="420000"/>
+          </a:xfrm>
+          <a:prstGeom prst="rect">
+            <a:avLst/>
+          </a:prstGeom>
+          <a:noFill/>
+        </p:spPr>
+        <p:txBody>
+          <a:bodyPr wrap="square">
+            <a:spAutoFit/>
+          </a:bodyPr>
+          <a:lstStyle/>
+          <a:p>
+            <a:pPr>
+              <a:spcAft>
+                <a:spcPts val="630"/>
+              </a:spcAft>
+            </a:pPr>
+            <a:r>
+              <a:rPr sz="1400" b="1">
+                <a:solidFill>
+                  <a:srgbClr val="F4B183"/>
+                </a:solidFill>
+                <a:latin typeface="Nunito Sans"/>
+              </a:rPr>
               <a:t>AHORA, LA HOJA DEL DÍA</a:t>
             </a:r>
           </a:p>
@@ -5585,7 +5245,7 @@
                 </a:solidFill>
                 <a:latin typeface="Nunito Sans"/>
               </a:rPr>
-              <a:t>Sin apuntes. Junto a cada respuesta, marca «seguro» o «dudo».</a:t>
+              <a:t>1.ª pasada: sin apuntes, con bolígrafo. 2.ª pasada: con los apuntes, en otro color. Marca «seguro» o «dudo» en cada respuesta.</a:t>
             </a:r>
           </a:p>
         </p:txBody>
@@ -5737,7 +5397,7 @@
                 </a:solidFill>
                 <a:latin typeface="Nunito Sans"/>
               </a:rPr>
-              <a:t>La media se calcula ______ todos los datos y dividiendo entre cuántos hay.  (sesión 41)</a:t>
+              <a:t>Un ______ es algo importante que guía lo que hacemos.  (sesión 41)</a:t>
             </a:r>
           </a:p>
           <a:p>
@@ -5762,7 +5422,7 @@
                 </a:solidFill>
                 <a:latin typeface="Nunito Sans"/>
               </a:rPr>
-              <a:t>La ______ es el dato del medio, cuando los ordenas de menor a mayor.  (sesión 41)</a:t>
+              <a:t>En el caso de la amiga que copia chocan la lealtad y la ______.  (sesión 41)</a:t>
             </a:r>
           </a:p>
           <a:p>
@@ -5787,7 +5447,7 @@
                 </a:solidFill>
                 <a:latin typeface="Nunito Sans"/>
               </a:rPr>
-              <a:t>Un porcentaje dice cuántos hay de cada ______.  (sesión 37)</a:t>
+              <a:t>Tres preguntas a una fuente: ¿quién lo dice?, ¿cómo lo sabe?, ¿qué ______?  (sesión 37)</a:t>
             </a:r>
           </a:p>
         </p:txBody>
@@ -5939,7 +5599,7 @@
                 </a:solidFill>
                 <a:latin typeface="Nunito Sans"/>
               </a:rPr>
-              <a:t>La media se calcula </a:t>
+              <a:t>Un </a:t>
             </a:r>
             <a:r>
               <a:rPr sz="2600" b="1">
@@ -5948,7 +5608,7 @@
                 </a:solidFill>
                 <a:latin typeface="Nunito Sans"/>
               </a:rPr>
-              <a:t>sumando</a:t>
+              <a:t>valor</a:t>
             </a:r>
             <a:r>
               <a:rPr sz="2600" b="0">
@@ -5957,7 +5617,7 @@
                 </a:solidFill>
                 <a:latin typeface="Nunito Sans"/>
               </a:rPr>
-              <a:t> todos los datos y dividiendo entre cuántos hay.  (sesión 41)</a:t>
+              <a:t> es algo importante que guía lo que hacemos.  (sesión 41)</a:t>
             </a:r>
           </a:p>
           <a:p>
@@ -5982,7 +5642,7 @@
                 </a:solidFill>
                 <a:latin typeface="Nunito Sans"/>
               </a:rPr>
-              <a:t>La </a:t>
+              <a:t>En el caso de la amiga que copia chocan la lealtad y la </a:t>
             </a:r>
             <a:r>
               <a:rPr sz="2600" b="1">
@@ -5991,7 +5651,7 @@
                 </a:solidFill>
                 <a:latin typeface="Nunito Sans"/>
               </a:rPr>
-              <a:t>mediana</a:t>
+              <a:t>justicia</a:t>
             </a:r>
             <a:r>
               <a:rPr sz="2600" b="0">
@@ -6000,7 +5660,7 @@
                 </a:solidFill>
                 <a:latin typeface="Nunito Sans"/>
               </a:rPr>
-              <a:t> es el dato del medio, cuando los ordenas de menor a mayor.  (sesión 41)</a:t>
+              <a:t>.  (sesión 41)</a:t>
             </a:r>
           </a:p>
           <a:p>
@@ -6025,7 +5685,7 @@
                 </a:solidFill>
                 <a:latin typeface="Nunito Sans"/>
               </a:rPr>
-              <a:t>Un porcentaje dice cuántos hay de cada </a:t>
+              <a:t>Tres preguntas a una fuente: ¿quién lo dice?, ¿cómo lo sabe?, ¿qué </a:t>
             </a:r>
             <a:r>
               <a:rPr sz="2600" b="1">
@@ -6034,7 +5694,7 @@
                 </a:solidFill>
                 <a:latin typeface="Nunito Sans"/>
               </a:rPr>
-              <a:t>100</a:t>
+              <a:t>gana</a:t>
             </a:r>
             <a:r>
               <a:rPr sz="2600" b="0">
@@ -6043,7 +5703,7 @@
                 </a:solidFill>
                 <a:latin typeface="Nunito Sans"/>
               </a:rPr>
-              <a:t>.  (sesión 37)</a:t>
+              <a:t>?  (sesión 37)</a:t>
             </a:r>
           </a:p>
         </p:txBody>
@@ -6190,7 +5850,7 @@
                 </a:solidFill>
                 <a:latin typeface="Nunito Sans"/>
               </a:rPr>
-              <a:t>Un anuncio (inventado): «¡El 80 % duerme mejor con la almohada Nube!». En letra pequeña: «Encuesta a 10 clientes». Y un gráfico con el eje cortado.</a:t>
+              <a:t>Un chico le cuenta un secreto a su mejor amigo y le hace prometer que no se lo dirá a nadie. Después, el amigo se da cuenta de que puede estar en peligro.</a:t>
             </a:r>
           </a:p>
         </p:txBody>
@@ -6229,7 +5889,7 @@
                 </a:solidFill>
                 <a:latin typeface="Nunito Sans"/>
               </a:rPr>
-              <a:t>¿Cuántos trucos de la unidad encuentras?</a:t>
+              <a:t>¿Una promesa hay que cumplirla siempre? ¿Qué necesitarías saber para decidir?</a:t>
             </a:r>
           </a:p>
         </p:txBody>
@@ -6333,7 +5993,7 @@
                 </a:solidFill>
                 <a:latin typeface="Fredoka"/>
               </a:rPr>
-              <a:t>Repaso de la unidad 7</a:t>
+              <a:t>Cuatro preguntas</a:t>
             </a:r>
           </a:p>
         </p:txBody>
@@ -6398,7 +6058,7 @@
                 </a:solidFill>
                 <a:latin typeface="Nunito Sans"/>
               </a:rPr>
-              <a:t>BLOQUE 1 · REPASO DE LA UNIDAD 7</a:t>
+              <a:t>BLOQUE 1 · CUATRO PREGUNTAS</a:t>
             </a:r>
           </a:p>
         </p:txBody>
@@ -6437,267 +6097,206 @@
                 </a:solidFill>
                 <a:latin typeface="Fredoka"/>
               </a:rPr>
-              <a:t>Porcentajes y cifras (sesión 37)</a:t>
-            </a:r>
-          </a:p>
-        </p:txBody>
-      </p:sp>
-      <p:graphicFrame>
-        <p:nvGraphicFramePr>
-          <p:cNvPr id="4" name="Table 3"/>
-          <p:cNvGraphicFramePr>
-            <a:graphicFrameLocks noGrp="1"/>
-          </p:cNvGraphicFramePr>
+              <a:t>Cuatro preguntas para pensar un dilema</a:t>
+            </a:r>
+          </a:p>
+        </p:txBody>
+      </p:sp>
+      <p:sp>
+        <p:nvSpPr>
+          <p:cNvPr id="4" name="TextBox 3"/>
+          <p:cNvSpPr txBox="1"/>
           <p:nvPr/>
-        </p:nvGraphicFramePr>
-        <p:xfrm>
-          <a:off x="640000" y="1700000"/>
-          <a:ext cx="10912000" cy="3000000"/>
-        </p:xfrm>
-        <a:graphic>
-          <a:graphicData uri="http://schemas.openxmlformats.org/drawingml/2006/table">
-            <a:tbl>
-              <a:tblPr firstRow="1" bandRow="1">
-                <a:tableStyleId>{5C22544A-7EE6-4342-B048-85BDC9FD1C3A}</a:tableStyleId>
-              </a:tblPr>
-              <a:tblGrid>
-                <a:gridCol w="5456000"/>
-                <a:gridCol w="5456000"/>
-              </a:tblGrid>
-              <a:tr h="600000">
-                <a:tc>
-                  <a:txBody>
-                    <a:bodyPr/>
-                    <a:lstStyle/>
-                    <a:p>
-                      <a:r>
-                        <a:rPr sz="2000" b="1">
-                          <a:solidFill>
-                            <a:srgbClr val="FBF7EF"/>
-                          </a:solidFill>
-                          <a:latin typeface="Fredoka"/>
-                        </a:rPr>
-                        <a:t>Idea</a:t>
-                      </a:r>
-                    </a:p>
-                  </a:txBody>
-                  <a:tcPr>
-                    <a:solidFill>
-                      <a:srgbClr val="1F2A44"/>
-                    </a:solidFill>
-                  </a:tcPr>
-                </a:tc>
-                <a:tc>
-                  <a:txBody>
-                    <a:bodyPr/>
-                    <a:lstStyle/>
-                    <a:p>
-                      <a:r>
-                        <a:rPr sz="2000" b="1">
-                          <a:solidFill>
-                            <a:srgbClr val="FBF7EF"/>
-                          </a:solidFill>
-                          <a:latin typeface="Fredoka"/>
-                        </a:rPr>
-                        <a:t>Qué preguntar</a:t>
-                      </a:r>
-                    </a:p>
-                  </a:txBody>
-                  <a:tcPr>
-                    <a:solidFill>
-                      <a:srgbClr val="1F2A44"/>
-                    </a:solidFill>
-                  </a:tcPr>
-                </a:tc>
-              </a:tr>
-              <a:tr h="600000">
-                <a:tc>
-                  <a:txBody>
-                    <a:bodyPr/>
-                    <a:lstStyle/>
-                    <a:p>
-                      <a:r>
-                        <a:rPr sz="2000" b="0">
-                          <a:solidFill>
-                            <a:srgbClr val="1F2A44"/>
-                          </a:solidFill>
-                          <a:latin typeface="Nunito Sans"/>
-                        </a:rPr>
-                        <a:t>Porcentaje = cuántos de cada 100</a:t>
-                      </a:r>
-                    </a:p>
-                  </a:txBody>
-                  <a:tcPr>
-                    <a:solidFill>
-                      <a:srgbClr val="FFFFFF"/>
-                    </a:solidFill>
-                  </a:tcPr>
-                </a:tc>
-                <a:tc>
-                  <a:txBody>
-                    <a:bodyPr/>
-                    <a:lstStyle/>
-                    <a:p>
-                      <a:r>
-                        <a:rPr sz="2000" b="0">
-                          <a:solidFill>
-                            <a:srgbClr val="1F2A44"/>
-                          </a:solidFill>
-                          <a:latin typeface="Nunito Sans"/>
-                        </a:rPr>
-                        <a:t>¿Porcentaje de qué?</a:t>
-                      </a:r>
-                    </a:p>
-                  </a:txBody>
-                  <a:tcPr>
-                    <a:solidFill>
-                      <a:srgbClr val="FFFFFF"/>
-                    </a:solidFill>
-                  </a:tcPr>
-                </a:tc>
-              </a:tr>
-              <a:tr h="600000">
-                <a:tc>
-                  <a:txBody>
-                    <a:bodyPr/>
-                    <a:lstStyle/>
-                    <a:p>
-                      <a:r>
-                        <a:rPr sz="2000" b="0">
-                          <a:solidFill>
-                            <a:srgbClr val="1F2A44"/>
-                          </a:solidFill>
-                          <a:latin typeface="Nunito Sans"/>
-                        </a:rPr>
-                        <a:t>«El doble» de casi nada</a:t>
-                      </a:r>
-                    </a:p>
-                  </a:txBody>
-                  <a:tcPr>
-                    <a:solidFill>
-                      <a:srgbClr val="EAF0F7"/>
-                    </a:solidFill>
-                  </a:tcPr>
-                </a:tc>
-                <a:tc>
-                  <a:txBody>
-                    <a:bodyPr/>
-                    <a:lstStyle/>
-                    <a:p>
-                      <a:r>
-                        <a:rPr sz="2000" b="0">
-                          <a:solidFill>
-                            <a:srgbClr val="1F2A44"/>
-                          </a:solidFill>
-                          <a:latin typeface="Nunito Sans"/>
-                        </a:rPr>
-                        <a:t>¿De cuántos se parte?</a:t>
-                      </a:r>
-                    </a:p>
-                  </a:txBody>
-                  <a:tcPr>
-                    <a:solidFill>
-                      <a:srgbClr val="EAF0F7"/>
-                    </a:solidFill>
-                  </a:tcPr>
-                </a:tc>
-              </a:tr>
-              <a:tr h="600000">
-                <a:tc>
-                  <a:txBody>
-                    <a:bodyPr/>
-                    <a:lstStyle/>
-                    <a:p>
-                      <a:r>
-                        <a:rPr sz="2000" b="0">
-                          <a:solidFill>
-                            <a:srgbClr val="1F2A44"/>
-                          </a:solidFill>
-                          <a:latin typeface="Nunito Sans"/>
-                        </a:rPr>
-                        <a:t>Cifra absoluta y cifra relativa</a:t>
-                      </a:r>
-                    </a:p>
-                  </a:txBody>
-                  <a:tcPr>
-                    <a:solidFill>
-                      <a:srgbClr val="FFFFFF"/>
-                    </a:solidFill>
-                  </a:tcPr>
-                </a:tc>
-                <a:tc>
-                  <a:txBody>
-                    <a:bodyPr/>
-                    <a:lstStyle/>
-                    <a:p>
-                      <a:r>
-                        <a:rPr sz="2000" b="0">
-                          <a:solidFill>
-                            <a:srgbClr val="1F2A44"/>
-                          </a:solidFill>
-                          <a:latin typeface="Nunito Sans"/>
-                        </a:rPr>
-                        <a:t>¿Cuántos eran en total?</a:t>
-                      </a:r>
-                    </a:p>
-                  </a:txBody>
-                  <a:tcPr>
-                    <a:solidFill>
-                      <a:srgbClr val="FFFFFF"/>
-                    </a:solidFill>
-                  </a:tcPr>
-                </a:tc>
-              </a:tr>
-              <a:tr h="600000">
-                <a:tc>
-                  <a:txBody>
-                    <a:bodyPr/>
-                    <a:lstStyle/>
-                    <a:p>
-                      <a:r>
-                        <a:rPr sz="2000" b="0">
-                          <a:solidFill>
-                            <a:srgbClr val="1F2A44"/>
-                          </a:solidFill>
-                          <a:latin typeface="Nunito Sans"/>
-                        </a:rPr>
-                        <a:t>Puntos y por ciento</a:t>
-                      </a:r>
-                    </a:p>
-                  </a:txBody>
-                  <a:tcPr>
-                    <a:solidFill>
-                      <a:srgbClr val="EAF0F7"/>
-                    </a:solidFill>
-                  </a:tcPr>
-                </a:tc>
-                <a:tc>
-                  <a:txBody>
-                    <a:bodyPr/>
-                    <a:lstStyle/>
-                    <a:p>
-                      <a:r>
-                        <a:rPr sz="2000" b="0">
-                          <a:solidFill>
-                            <a:srgbClr val="1F2A44"/>
-                          </a:solidFill>
-                          <a:latin typeface="Nunito Sans"/>
-                        </a:rPr>
-                        <a:t>¿Es la resta o la proporción?</a:t>
-                      </a:r>
-                    </a:p>
-                  </a:txBody>
-                  <a:tcPr>
-                    <a:solidFill>
-                      <a:srgbClr val="EAF0F7"/>
-                    </a:solidFill>
-                  </a:tcPr>
-                </a:tc>
-              </a:tr>
-            </a:tbl>
-          </a:graphicData>
-        </a:graphic>
-      </p:graphicFrame>
+        </p:nvSpPr>
+        <p:spPr>
+          <a:xfrm>
+            <a:off x="640000" y="1650000"/>
+            <a:ext cx="10912000" cy="4808000"/>
+          </a:xfrm>
+          <a:prstGeom prst="rect">
+            <a:avLst/>
+          </a:prstGeom>
+          <a:noFill/>
+        </p:spPr>
+        <p:txBody>
+          <a:bodyPr wrap="square">
+            <a:spAutoFit/>
+          </a:bodyPr>
+          <a:lstStyle/>
+          <a:p>
+            <a:pPr>
+              <a:spcAft>
+                <a:spcPts val="1260"/>
+              </a:spcAft>
+            </a:pPr>
+            <a:r>
+              <a:rPr sz="2800" b="1">
+                <a:solidFill>
+                  <a:srgbClr val="E8793A"/>
+                </a:solidFill>
+                <a:latin typeface="Nunito Sans"/>
+              </a:rPr>
+              <a:t>• </a:t>
+            </a:r>
+            <a:r>
+              <a:rPr sz="2800" b="0">
+                <a:solidFill>
+                  <a:srgbClr val="1F2A44"/>
+                </a:solidFill>
+                <a:latin typeface="Nunito Sans"/>
+              </a:rPr>
+              <a:t>1 · ¿Qué </a:t>
+            </a:r>
+            <a:r>
+              <a:rPr sz="2800" b="1">
+                <a:solidFill>
+                  <a:srgbClr val="1F2A44"/>
+                </a:solidFill>
+                <a:latin typeface="Nunito Sans"/>
+              </a:rPr>
+              <a:t>valores</a:t>
+            </a:r>
+            <a:r>
+              <a:rPr sz="2800" b="0">
+                <a:solidFill>
+                  <a:srgbClr val="1F2A44"/>
+                </a:solidFill>
+                <a:latin typeface="Nunito Sans"/>
+              </a:rPr>
+              <a:t> chocan?</a:t>
+            </a:r>
+          </a:p>
+          <a:p>
+            <a:pPr>
+              <a:spcAft>
+                <a:spcPts val="1260"/>
+              </a:spcAft>
+            </a:pPr>
+            <a:r>
+              <a:rPr sz="2800" b="1">
+                <a:solidFill>
+                  <a:srgbClr val="E8793A"/>
+                </a:solidFill>
+                <a:latin typeface="Nunito Sans"/>
+              </a:rPr>
+              <a:t>• </a:t>
+            </a:r>
+            <a:r>
+              <a:rPr sz="2800" b="0">
+                <a:solidFill>
+                  <a:srgbClr val="1F2A44"/>
+                </a:solidFill>
+                <a:latin typeface="Nunito Sans"/>
+              </a:rPr>
+              <a:t>2 · ¿Hay más </a:t>
+            </a:r>
+            <a:r>
+              <a:rPr sz="2800" b="1">
+                <a:solidFill>
+                  <a:srgbClr val="1F2A44"/>
+                </a:solidFill>
+                <a:latin typeface="Nunito Sans"/>
+              </a:rPr>
+              <a:t>salidas</a:t>
+            </a:r>
+            <a:r>
+              <a:rPr sz="2800" b="0">
+                <a:solidFill>
+                  <a:srgbClr val="1F2A44"/>
+                </a:solidFill>
+                <a:latin typeface="Nunito Sans"/>
+              </a:rPr>
+              <a:t> que las dos primeras?</a:t>
+            </a:r>
+          </a:p>
+          <a:p>
+            <a:pPr>
+              <a:spcAft>
+                <a:spcPts val="1260"/>
+              </a:spcAft>
+            </a:pPr>
+            <a:r>
+              <a:rPr sz="2800" b="1">
+                <a:solidFill>
+                  <a:srgbClr val="E8793A"/>
+                </a:solidFill>
+                <a:latin typeface="Nunito Sans"/>
+              </a:rPr>
+              <a:t>• </a:t>
+            </a:r>
+            <a:r>
+              <a:rPr sz="2800" b="0">
+                <a:solidFill>
+                  <a:srgbClr val="1F2A44"/>
+                </a:solidFill>
+                <a:latin typeface="Nunito Sans"/>
+              </a:rPr>
+              <a:t>3 · ¿Qué </a:t>
+            </a:r>
+            <a:r>
+              <a:rPr sz="2800" b="1">
+                <a:solidFill>
+                  <a:srgbClr val="1F2A44"/>
+                </a:solidFill>
+                <a:latin typeface="Nunito Sans"/>
+              </a:rPr>
+              <a:t>consecuencias</a:t>
+            </a:r>
+            <a:r>
+              <a:rPr sz="2800" b="0">
+                <a:solidFill>
+                  <a:srgbClr val="1F2A44"/>
+                </a:solidFill>
+                <a:latin typeface="Nunito Sans"/>
+              </a:rPr>
+              <a:t> tiene cada opción, y para quién?</a:t>
+            </a:r>
+          </a:p>
+          <a:p>
+            <a:pPr>
+              <a:spcAft>
+                <a:spcPts val="1260"/>
+              </a:spcAft>
+            </a:pPr>
+            <a:r>
+              <a:rPr sz="2800" b="1">
+                <a:solidFill>
+                  <a:srgbClr val="E8793A"/>
+                </a:solidFill>
+                <a:latin typeface="Nunito Sans"/>
+              </a:rPr>
+              <a:t>• </a:t>
+            </a:r>
+            <a:r>
+              <a:rPr sz="2800" b="0">
+                <a:solidFill>
+                  <a:srgbClr val="1F2A44"/>
+                </a:solidFill>
+                <a:latin typeface="Nunito Sans"/>
+              </a:rPr>
+              <a:t>4 · ¿Aceptaría que </a:t>
+            </a:r>
+            <a:r>
+              <a:rPr sz="2800" b="1">
+                <a:solidFill>
+                  <a:srgbClr val="1F2A44"/>
+                </a:solidFill>
+                <a:latin typeface="Nunito Sans"/>
+              </a:rPr>
+              <a:t>todos</a:t>
+            </a:r>
+            <a:r>
+              <a:rPr sz="2800" b="0">
+                <a:solidFill>
+                  <a:srgbClr val="1F2A44"/>
+                </a:solidFill>
+                <a:latin typeface="Nunito Sans"/>
+              </a:rPr>
+              <a:t> hicieran lo mismo en mi lugar?</a:t>
+            </a:r>
+          </a:p>
+        </p:txBody>
+      </p:sp>
     </p:spTree>
   </p:cSld>
   <p:clrMapOvr>
@@ -6758,7 +6357,7 @@
                 </a:solidFill>
                 <a:latin typeface="Nunito Sans"/>
               </a:rPr>
-              <a:t>BLOQUE 1 · REPASO DE LA UNIDAD 7</a:t>
+              <a:t>BLOQUE 1 · CUATRO PREGUNTAS</a:t>
             </a:r>
           </a:p>
         </p:txBody>
@@ -6797,21 +6396,64 @@
                 </a:solidFill>
                 <a:latin typeface="Fredoka"/>
               </a:rPr>
-              <a:t>Gráficos engañosos (sesión 38)</a:t>
-            </a:r>
-          </a:p>
-        </p:txBody>
-      </p:sp>
-      <p:sp>
-        <p:nvSpPr>
-          <p:cNvPr id="4" name="TextBox 3"/>
+              <a:t>Buscar más salidas</a:t>
+            </a:r>
+          </a:p>
+        </p:txBody>
+      </p:sp>
+      <p:sp>
+        <p:nvSpPr>
+          <p:cNvPr id="4" name="Rectangle 3"/>
+          <p:cNvSpPr/>
+          <p:nvPr/>
+        </p:nvSpPr>
+        <p:spPr>
+          <a:xfrm>
+            <a:off x="640000" y="1650000"/>
+            <a:ext cx="10912000" cy="1150000"/>
+          </a:xfrm>
+          <a:prstGeom prst="rect">
+            <a:avLst/>
+          </a:prstGeom>
+          <a:solidFill>
+            <a:srgbClr val="EAF0F7"/>
+          </a:solidFill>
+          <a:ln>
+            <a:noFill/>
+          </a:ln>
+        </p:spPr>
+        <p:style>
+          <a:lnRef idx="1">
+            <a:schemeClr val="accent1"/>
+          </a:lnRef>
+          <a:fillRef idx="3">
+            <a:schemeClr val="accent1"/>
+          </a:fillRef>
+          <a:effectRef idx="2">
+            <a:schemeClr val="accent1"/>
+          </a:effectRef>
+          <a:fontRef idx="minor">
+            <a:schemeClr val="lt1"/>
+          </a:fontRef>
+        </p:style>
+        <p:txBody>
+          <a:bodyPr rtlCol="0" anchor="ctr"/>
+          <a:lstStyle/>
+          <a:p>
+            <a:pPr algn="ctr"/>
+          </a:p>
+        </p:txBody>
+      </p:sp>
+      <p:sp>
+        <p:nvSpPr>
+          <p:cNvPr id="5" name="TextBox 4"/>
           <p:cNvSpPr txBox="1"/>
           <p:nvPr/>
         </p:nvSpPr>
         <p:spPr>
           <a:xfrm>
-            <a:off x="640000" y="1650000"/>
-            <a:ext cx="10912000" cy="4808000"/>
+            <a:off x="840000" y="1730000"/>
+            <a:ext cx="10512000" cy="1000000"/>
           </a:xfrm>
           <a:prstGeom prst="rect">
             <a:avLst/>
@@ -6819,7 +6461,7 @@
           <a:noFill/>
         </p:spPr>
         <p:txBody>
-          <a:bodyPr wrap="square">
+          <a:bodyPr wrap="square" anchor="ctr">
             <a:spAutoFit/>
           </a:bodyPr>
           <a:lstStyle/>
@@ -6832,11 +6474,11 @@
             <a:r>
               <a:rPr sz="2800" b="1">
                 <a:solidFill>
-                  <a:srgbClr val="E8793A"/>
-                </a:solidFill>
-                <a:latin typeface="Nunito Sans"/>
-              </a:rPr>
-              <a:t>• </a:t>
+                  <a:srgbClr val="1F2A44"/>
+                </a:solidFill>
+                <a:latin typeface="Nunito Sans"/>
+              </a:rPr>
+              <a:t>Muchos dilemas parecen de dos opciones, pero hay </a:t>
             </a:r>
             <a:r>
               <a:rPr sz="2800" b="1">
@@ -6845,18 +6487,41 @@
                 </a:solidFill>
                 <a:latin typeface="Nunito Sans"/>
               </a:rPr>
-              <a:t>Eje cortado en barras:</a:t>
-            </a:r>
-            <a:r>
-              <a:rPr sz="2800" b="0">
+              <a:t>más salidas</a:t>
+            </a:r>
+            <a:r>
+              <a:rPr sz="2800" b="1">
                 <a:solidFill>
                   <a:srgbClr val="1F2A44"/>
                 </a:solidFill>
                 <a:latin typeface="Nunito Sans"/>
               </a:rPr>
-              <a:t> exagera las diferencias (en temperaturas puede estar bien)</a:t>
-            </a:r>
-          </a:p>
+              <a:t>. Si las olvidamos, caemos en un falso dilema (sesión 26).</a:t>
+            </a:r>
+          </a:p>
+        </p:txBody>
+      </p:sp>
+      <p:sp>
+        <p:nvSpPr>
+          <p:cNvPr id="6" name="TextBox 5"/>
+          <p:cNvSpPr txBox="1"/>
+          <p:nvPr/>
+        </p:nvSpPr>
+        <p:spPr>
+          <a:xfrm>
+            <a:off x="640000" y="3000000"/>
+            <a:ext cx="10912000" cy="3458000"/>
+          </a:xfrm>
+          <a:prstGeom prst="rect">
+            <a:avLst/>
+          </a:prstGeom>
+          <a:noFill/>
+        </p:spPr>
+        <p:txBody>
+          <a:bodyPr wrap="square">
+            <a:spAutoFit/>
+          </a:bodyPr>
+          <a:lstStyle/>
           <a:p>
             <a:pPr>
               <a:spcAft>
@@ -6873,22 +6538,13 @@
               <a:t>• </a:t>
             </a:r>
             <a:r>
-              <a:rPr sz="2800" b="1">
+              <a:rPr sz="2800" b="0">
                 <a:solidFill>
                   <a:srgbClr val="1F2A44"/>
                 </a:solidFill>
                 <a:latin typeface="Nunito Sans"/>
               </a:rPr>
-              <a:t>Escala y dibujos:</a:t>
-            </a:r>
-            <a:r>
-              <a:rPr sz="2800" b="0">
-                <a:solidFill>
-                  <a:srgbClr val="1F2A44"/>
-                </a:solidFill>
-                <a:latin typeface="Nunito Sans"/>
-              </a:rPr>
-              <a:t> estiran o agrandan la impresión</a:t>
+              <a:t>Ejemplo: ni chivarse ni callar, sino hablar antes con la amiga</a:t>
             </a:r>
           </a:p>
           <a:p>
@@ -6907,56 +6563,13 @@
               <a:t>• </a:t>
             </a:r>
             <a:r>
-              <a:rPr sz="2800" b="1">
+              <a:rPr sz="2800" b="0">
                 <a:solidFill>
                   <a:srgbClr val="1F2A44"/>
                 </a:solidFill>
                 <a:latin typeface="Nunito Sans"/>
               </a:rPr>
-              <a:t>Colores:</a:t>
-            </a:r>
-            <a:r>
-              <a:rPr sz="2800" b="0">
-                <a:solidFill>
-                  <a:srgbClr val="1F2A44"/>
-                </a:solidFill>
-                <a:latin typeface="Nunito Sans"/>
-              </a:rPr>
-              <a:t> el rojo asusta aunque el dato sea pequeño</a:t>
-            </a:r>
-          </a:p>
-          <a:p>
-            <a:pPr>
-              <a:spcAft>
-                <a:spcPts val="1260"/>
-              </a:spcAft>
-            </a:pPr>
-            <a:r>
-              <a:rPr sz="2800" b="1">
-                <a:solidFill>
-                  <a:srgbClr val="E8793A"/>
-                </a:solidFill>
-                <a:latin typeface="Nunito Sans"/>
-              </a:rPr>
-              <a:t>• </a:t>
-            </a:r>
-            <a:r>
-              <a:rPr sz="2800" b="1">
-                <a:solidFill>
-                  <a:srgbClr val="1F2A44"/>
-                </a:solidFill>
-                <a:latin typeface="Nunito Sans"/>
-              </a:rPr>
-              <a:t>Fechas recortadas:</a:t>
-            </a:r>
-            <a:r>
-              <a:rPr sz="2800" b="0">
-                <a:solidFill>
-                  <a:srgbClr val="1F2A44"/>
-                </a:solidFill>
-                <a:latin typeface="Nunito Sans"/>
-              </a:rPr>
-              <a:t> enseñan solo lo que conviene</a:t>
+              <a:t>Una salida nueva puede salvar los dos valores</a:t>
             </a:r>
           </a:p>
         </p:txBody>
@@ -7021,7 +6634,7 @@
                 </a:solidFill>
                 <a:latin typeface="Nunito Sans"/>
               </a:rPr>
-              <a:t>BLOQUE 1 · REPASO DE LA UNIDAD 7</a:t>
+              <a:t>BLOQUE 1 · CUATRO PREGUNTAS</a:t>
             </a:r>
           </a:p>
         </p:txBody>
@@ -7060,221 +6673,193 @@
                 </a:solidFill>
                 <a:latin typeface="Fredoka"/>
               </a:rPr>
-              <a:t>Encuestas y muestras (sesión 39)</a:t>
-            </a:r>
-          </a:p>
-        </p:txBody>
-      </p:sp>
-      <p:graphicFrame>
-        <p:nvGraphicFramePr>
-          <p:cNvPr id="4" name="Table 3"/>
-          <p:cNvGraphicFramePr>
-            <a:graphicFrameLocks noGrp="1"/>
-          </p:cNvGraphicFramePr>
+              <a:t>¿Y si todos lo hicieran?</a:t>
+            </a:r>
+          </a:p>
+        </p:txBody>
+      </p:sp>
+      <p:sp>
+        <p:nvSpPr>
+          <p:cNvPr id="4" name="Rectangle 3"/>
+          <p:cNvSpPr/>
           <p:nvPr/>
-        </p:nvGraphicFramePr>
-        <p:xfrm>
-          <a:off x="640000" y="1700000"/>
-          <a:ext cx="10912000" cy="2400000"/>
-        </p:xfrm>
-        <a:graphic>
-          <a:graphicData uri="http://schemas.openxmlformats.org/drawingml/2006/table">
-            <a:tbl>
-              <a:tblPr firstRow="1" bandRow="1">
-                <a:tableStyleId>{5C22544A-7EE6-4342-B048-85BDC9FD1C3A}</a:tableStyleId>
-              </a:tblPr>
-              <a:tblGrid>
-                <a:gridCol w="5456000"/>
-                <a:gridCol w="5456000"/>
-              </a:tblGrid>
-              <a:tr h="600000">
-                <a:tc>
-                  <a:txBody>
-                    <a:bodyPr/>
-                    <a:lstStyle/>
-                    <a:p>
-                      <a:r>
-                        <a:rPr sz="2000" b="1">
-                          <a:solidFill>
-                            <a:srgbClr val="FBF7EF"/>
-                          </a:solidFill>
-                          <a:latin typeface="Fredoka"/>
-                        </a:rPr>
-                        <a:t>Pregunta</a:t>
-                      </a:r>
-                    </a:p>
-                  </a:txBody>
-                  <a:tcPr>
-                    <a:solidFill>
-                      <a:srgbClr val="1F2A44"/>
-                    </a:solidFill>
-                  </a:tcPr>
-                </a:tc>
-                <a:tc>
-                  <a:txBody>
-                    <a:bodyPr/>
-                    <a:lstStyle/>
-                    <a:p>
-                      <a:r>
-                        <a:rPr sz="2000" b="1">
-                          <a:solidFill>
-                            <a:srgbClr val="FBF7EF"/>
-                          </a:solidFill>
-                          <a:latin typeface="Fredoka"/>
-                        </a:rPr>
-                        <a:t>Qué buscar</a:t>
-                      </a:r>
-                    </a:p>
-                  </a:txBody>
-                  <a:tcPr>
-                    <a:solidFill>
-                      <a:srgbClr val="1F2A44"/>
-                    </a:solidFill>
-                  </a:tcPr>
-                </a:tc>
-              </a:tr>
-              <a:tr h="600000">
-                <a:tc>
-                  <a:txBody>
-                    <a:bodyPr/>
-                    <a:lstStyle/>
-                    <a:p>
-                      <a:r>
-                        <a:rPr sz="2000" b="0">
-                          <a:solidFill>
-                            <a:srgbClr val="1F2A44"/>
-                          </a:solidFill>
-                          <a:latin typeface="Nunito Sans"/>
-                        </a:rPr>
-                        <a:t>¿A cuántos?</a:t>
-                      </a:r>
-                    </a:p>
-                  </a:txBody>
-                  <a:tcPr>
-                    <a:solidFill>
-                      <a:srgbClr val="FFFFFF"/>
-                    </a:solidFill>
-                  </a:tcPr>
-                </a:tc>
-                <a:tc>
-                  <a:txBody>
-                    <a:bodyPr/>
-                    <a:lstStyle/>
-                    <a:p>
-                      <a:r>
-                        <a:rPr sz="2000" b="0">
-                          <a:solidFill>
-                            <a:srgbClr val="1F2A44"/>
-                          </a:solidFill>
-                          <a:latin typeface="Nunito Sans"/>
-                        </a:rPr>
-                        <a:t>Bastantes personas, no 5 ni 10</a:t>
-                      </a:r>
-                    </a:p>
-                  </a:txBody>
-                  <a:tcPr>
-                    <a:solidFill>
-                      <a:srgbClr val="FFFFFF"/>
-                    </a:solidFill>
-                  </a:tcPr>
-                </a:tc>
-              </a:tr>
-              <a:tr h="600000">
-                <a:tc>
-                  <a:txBody>
-                    <a:bodyPr/>
-                    <a:lstStyle/>
-                    <a:p>
-                      <a:r>
-                        <a:rPr sz="2000" b="0">
-                          <a:solidFill>
-                            <a:srgbClr val="1F2A44"/>
-                          </a:solidFill>
-                          <a:latin typeface="Nunito Sans"/>
-                        </a:rPr>
-                        <a:t>¿A quiénes?</a:t>
-                      </a:r>
-                    </a:p>
-                  </a:txBody>
-                  <a:tcPr>
-                    <a:solidFill>
-                      <a:srgbClr val="EAF0F7"/>
-                    </a:solidFill>
-                  </a:tcPr>
-                </a:tc>
-                <a:tc>
-                  <a:txBody>
-                    <a:bodyPr/>
-                    <a:lstStyle/>
-                    <a:p>
-                      <a:r>
-                        <a:rPr sz="2000" b="0">
-                          <a:solidFill>
-                            <a:srgbClr val="1F2A44"/>
-                          </a:solidFill>
-                          <a:latin typeface="Nunito Sans"/>
-                        </a:rPr>
-                        <a:t>Parecidos a la población, al azar (lo más importante)</a:t>
-                      </a:r>
-                    </a:p>
-                  </a:txBody>
-                  <a:tcPr>
-                    <a:solidFill>
-                      <a:srgbClr val="EAF0F7"/>
-                    </a:solidFill>
-                  </a:tcPr>
-                </a:tc>
-              </a:tr>
-              <a:tr h="600000">
-                <a:tc>
-                  <a:txBody>
-                    <a:bodyPr/>
-                    <a:lstStyle/>
-                    <a:p>
-                      <a:r>
-                        <a:rPr sz="2000" b="0">
-                          <a:solidFill>
-                            <a:srgbClr val="1F2A44"/>
-                          </a:solidFill>
-                          <a:latin typeface="Nunito Sans"/>
-                        </a:rPr>
-                        <a:t>¿Cómo se preguntó?</a:t>
-                      </a:r>
-                    </a:p>
-                  </a:txBody>
-                  <a:tcPr>
-                    <a:solidFill>
-                      <a:srgbClr val="FFFFFF"/>
-                    </a:solidFill>
-                  </a:tcPr>
-                </a:tc>
-                <a:tc>
-                  <a:txBody>
-                    <a:bodyPr/>
-                    <a:lstStyle/>
-                    <a:p>
-                      <a:r>
-                        <a:rPr sz="2000" b="0">
-                          <a:solidFill>
-                            <a:srgbClr val="1F2A44"/>
-                          </a:solidFill>
-                          <a:latin typeface="Nunito Sans"/>
-                        </a:rPr>
-                        <a:t>Una pregunta neutral, que no empuje</a:t>
-                      </a:r>
-                    </a:p>
-                  </a:txBody>
-                  <a:tcPr>
-                    <a:solidFill>
-                      <a:srgbClr val="FFFFFF"/>
-                    </a:solidFill>
-                  </a:tcPr>
-                </a:tc>
-              </a:tr>
-            </a:tbl>
-          </a:graphicData>
-        </a:graphic>
-      </p:graphicFrame>
+        </p:nvSpPr>
+        <p:spPr>
+          <a:xfrm>
+            <a:off x="640000" y="1650000"/>
+            <a:ext cx="10912000" cy="1150000"/>
+          </a:xfrm>
+          <a:prstGeom prst="rect">
+            <a:avLst/>
+          </a:prstGeom>
+          <a:solidFill>
+            <a:srgbClr val="EAF0F7"/>
+          </a:solidFill>
+          <a:ln>
+            <a:noFill/>
+          </a:ln>
+        </p:spPr>
+        <p:style>
+          <a:lnRef idx="1">
+            <a:schemeClr val="accent1"/>
+          </a:lnRef>
+          <a:fillRef idx="3">
+            <a:schemeClr val="accent1"/>
+          </a:fillRef>
+          <a:effectRef idx="2">
+            <a:schemeClr val="accent1"/>
+          </a:effectRef>
+          <a:fontRef idx="minor">
+            <a:schemeClr val="lt1"/>
+          </a:fontRef>
+        </p:style>
+        <p:txBody>
+          <a:bodyPr rtlCol="0" anchor="ctr"/>
+          <a:lstStyle/>
+          <a:p>
+            <a:pPr algn="ctr"/>
+          </a:p>
+        </p:txBody>
+      </p:sp>
+      <p:sp>
+        <p:nvSpPr>
+          <p:cNvPr id="5" name="TextBox 4"/>
+          <p:cNvSpPr txBox="1"/>
+          <p:nvPr/>
+        </p:nvSpPr>
+        <p:spPr>
+          <a:xfrm>
+            <a:off x="840000" y="1730000"/>
+            <a:ext cx="10512000" cy="1000000"/>
+          </a:xfrm>
+          <a:prstGeom prst="rect">
+            <a:avLst/>
+          </a:prstGeom>
+          <a:noFill/>
+        </p:spPr>
+        <p:txBody>
+          <a:bodyPr wrap="square" anchor="ctr">
+            <a:spAutoFit/>
+          </a:bodyPr>
+          <a:lstStyle/>
+          <a:p>
+            <a:pPr>
+              <a:spcAft>
+                <a:spcPts val="1260"/>
+              </a:spcAft>
+            </a:pPr>
+            <a:r>
+              <a:rPr sz="2800" b="1">
+                <a:solidFill>
+                  <a:srgbClr val="1F2A44"/>
+                </a:solidFill>
+                <a:latin typeface="Nunito Sans"/>
+              </a:rPr>
+              <a:t>Una buena razón vale también si yo estuviera en el </a:t>
+            </a:r>
+            <a:r>
+              <a:rPr sz="2800" b="1">
+                <a:solidFill>
+                  <a:srgbClr val="1F2A44"/>
+                </a:solidFill>
+                <a:latin typeface="Nunito Sans"/>
+              </a:rPr>
+              <a:t>lugar</a:t>
+            </a:r>
+            <a:r>
+              <a:rPr sz="2800" b="1">
+                <a:solidFill>
+                  <a:srgbClr val="1F2A44"/>
+                </a:solidFill>
+                <a:latin typeface="Nunito Sans"/>
+              </a:rPr>
+              <a:t> del otro.</a:t>
+            </a:r>
+          </a:p>
+        </p:txBody>
+      </p:sp>
+      <p:sp>
+        <p:nvSpPr>
+          <p:cNvPr id="6" name="TextBox 5"/>
+          <p:cNvSpPr txBox="1"/>
+          <p:nvPr/>
+        </p:nvSpPr>
+        <p:spPr>
+          <a:xfrm>
+            <a:off x="640000" y="3000000"/>
+            <a:ext cx="10912000" cy="3458000"/>
+          </a:xfrm>
+          <a:prstGeom prst="rect">
+            <a:avLst/>
+          </a:prstGeom>
+          <a:noFill/>
+        </p:spPr>
+        <p:txBody>
+          <a:bodyPr wrap="square">
+            <a:spAutoFit/>
+          </a:bodyPr>
+          <a:lstStyle/>
+          <a:p>
+            <a:pPr>
+              <a:spcAft>
+                <a:spcPts val="1260"/>
+              </a:spcAft>
+            </a:pPr>
+            <a:r>
+              <a:rPr sz="2800" b="1">
+                <a:solidFill>
+                  <a:srgbClr val="E8793A"/>
+                </a:solidFill>
+                <a:latin typeface="Nunito Sans"/>
+              </a:rPr>
+              <a:t>• </a:t>
+            </a:r>
+            <a:r>
+              <a:rPr sz="2800" b="0">
+                <a:solidFill>
+                  <a:srgbClr val="1F2A44"/>
+                </a:solidFill>
+                <a:latin typeface="Nunito Sans"/>
+              </a:rPr>
+              <a:t>Pregunta: ¿y si me lo hicieran a mí?</a:t>
+            </a:r>
+          </a:p>
+          <a:p>
+            <a:pPr>
+              <a:spcAft>
+                <a:spcPts val="1260"/>
+              </a:spcAft>
+            </a:pPr>
+            <a:r>
+              <a:rPr sz="2800" b="1">
+                <a:solidFill>
+                  <a:srgbClr val="E8793A"/>
+                </a:solidFill>
+                <a:latin typeface="Nunito Sans"/>
+              </a:rPr>
+              <a:t>• </a:t>
+            </a:r>
+            <a:r>
+              <a:rPr sz="2800" b="0">
+                <a:solidFill>
+                  <a:srgbClr val="1F2A44"/>
+                </a:solidFill>
+                <a:latin typeface="Nunito Sans"/>
+              </a:rPr>
+              <a:t>Si una razón solo vale cuando me conviene, es una </a:t>
+            </a:r>
+            <a:r>
+              <a:rPr sz="2800" b="1">
+                <a:solidFill>
+                  <a:srgbClr val="1F2A44"/>
+                </a:solidFill>
+                <a:latin typeface="Nunito Sans"/>
+              </a:rPr>
+              <a:t>excusa</a:t>
+            </a:r>
+          </a:p>
+        </p:txBody>
+      </p:sp>
     </p:spTree>
   </p:cSld>
   <p:clrMapOvr>
@@ -7289,7 +6874,7 @@
     <p:bg>
       <p:bgPr>
         <a:solidFill>
-          <a:srgbClr val="FBF7EF"/>
+          <a:srgbClr val="1F2A44"/>
         </a:solidFill>
         <a:effectLst/>
       </p:bgPr>
@@ -7309,8 +6894,8 @@
         </p:nvSpPr>
         <p:spPr>
           <a:xfrm>
-            <a:off x="640000" y="380000"/>
-            <a:ext cx="10912000" cy="420000"/>
+            <a:off x="640000" y="2300000"/>
+            <a:ext cx="10912000" cy="500000"/>
           </a:xfrm>
           <a:prstGeom prst="rect">
             <a:avLst/>
@@ -7325,17 +6910,17 @@
           <a:p>
             <a:pPr>
               <a:spcAft>
-                <a:spcPts val="630"/>
+                <a:spcPts val="810"/>
               </a:spcAft>
             </a:pPr>
             <a:r>
-              <a:rPr sz="1400" b="1">
-                <a:solidFill>
-                  <a:srgbClr val="E8793A"/>
-                </a:solidFill>
-                <a:latin typeface="Nunito Sans"/>
-              </a:rPr>
-              <a:t>BLOQUE 1 · REPASO DE LA UNIDAD 7</a:t>
+              <a:rPr sz="1800" b="1">
+                <a:solidFill>
+                  <a:srgbClr val="F4B183"/>
+                </a:solidFill>
+                <a:latin typeface="Nunito Sans"/>
+              </a:rPr>
+              <a:t>BLOQUE 2</a:t>
             </a:r>
           </a:p>
         </p:txBody>
@@ -7348,7 +6933,7 @@
         </p:nvSpPr>
         <p:spPr>
           <a:xfrm>
-            <a:off x="640000" y="760000"/>
+            <a:off x="640000" y="2800000"/>
             <a:ext cx="10912000" cy="800000"/>
           </a:xfrm>
           <a:prstGeom prst="rect">
@@ -7364,179 +6949,17 @@
           <a:p>
             <a:pPr>
               <a:spcAft>
-                <a:spcPts val="1710"/>
+                <a:spcPts val="2160"/>
               </a:spcAft>
             </a:pPr>
             <a:r>
-              <a:rPr sz="3800" b="1">
-                <a:solidFill>
-                  <a:srgbClr val="1F2A44"/>
+              <a:rPr sz="4800" b="1">
+                <a:solidFill>
+                  <a:srgbClr val="FBF7EF"/>
                 </a:solidFill>
                 <a:latin typeface="Fredoka"/>
               </a:rPr>
-              <a:t>Correlación y causa (sesión 40)</a:t>
-            </a:r>
-          </a:p>
-        </p:txBody>
-      </p:sp>
-      <p:sp>
-        <p:nvSpPr>
-          <p:cNvPr id="4" name="TextBox 3"/>
-          <p:cNvSpPr txBox="1"/>
-          <p:nvPr/>
-        </p:nvSpPr>
-        <p:spPr>
-          <a:xfrm>
-            <a:off x="840000" y="1730000"/>
-            <a:ext cx="10512000" cy="1000000"/>
-          </a:xfrm>
-          <a:prstGeom prst="rect">
-            <a:avLst/>
-          </a:prstGeom>
-          <a:noFill/>
-        </p:spPr>
-        <p:txBody>
-          <a:bodyPr wrap="square" anchor="ctr">
-            <a:spAutoFit/>
-          </a:bodyPr>
-          <a:lstStyle/>
-          <a:p>
-            <a:pPr>
-              <a:spcAft>
-                <a:spcPts val="1080"/>
-              </a:spcAft>
-            </a:pPr>
-            <a:r>
-              <a:rPr sz="2400" b="0">
-                <a:solidFill>
-                  <a:srgbClr val="1F2A44"/>
-                </a:solidFill>
-                <a:latin typeface="Nunito Sans"/>
-              </a:rPr>
-              <a:t>Si dos datos suben juntos, puede ser que…</a:t>
-            </a:r>
-          </a:p>
-        </p:txBody>
-      </p:sp>
-      <p:sp>
-        <p:nvSpPr>
-          <p:cNvPr id="5" name="TextBox 4"/>
-          <p:cNvSpPr txBox="1"/>
-          <p:nvPr/>
-        </p:nvSpPr>
-        <p:spPr>
-          <a:xfrm>
-            <a:off x="640000" y="3000000"/>
-            <a:ext cx="10912000" cy="3458000"/>
-          </a:xfrm>
-          <a:prstGeom prst="rect">
-            <a:avLst/>
-          </a:prstGeom>
-          <a:noFill/>
-        </p:spPr>
-        <p:txBody>
-          <a:bodyPr wrap="square">
-            <a:spAutoFit/>
-          </a:bodyPr>
-          <a:lstStyle/>
-          <a:p>
-            <a:pPr>
-              <a:spcAft>
-                <a:spcPts val="1260"/>
-              </a:spcAft>
-            </a:pPr>
-            <a:r>
-              <a:rPr sz="2800" b="1">
-                <a:solidFill>
-                  <a:srgbClr val="E8793A"/>
-                </a:solidFill>
-                <a:latin typeface="Nunito Sans"/>
-              </a:rPr>
-              <a:t>• </a:t>
-            </a:r>
-            <a:r>
-              <a:rPr sz="2800" b="0">
-                <a:solidFill>
-                  <a:srgbClr val="1F2A44"/>
-                </a:solidFill>
-                <a:latin typeface="Nunito Sans"/>
-              </a:rPr>
-              <a:t>A cause B (se sabe si se descartan las demás)</a:t>
-            </a:r>
-          </a:p>
-          <a:p>
-            <a:pPr>
-              <a:spcAft>
-                <a:spcPts val="1260"/>
-              </a:spcAft>
-            </a:pPr>
-            <a:r>
-              <a:rPr sz="2800" b="1">
-                <a:solidFill>
-                  <a:srgbClr val="E8793A"/>
-                </a:solidFill>
-                <a:latin typeface="Nunito Sans"/>
-              </a:rPr>
-              <a:t>• </a:t>
-            </a:r>
-            <a:r>
-              <a:rPr sz="2800" b="0">
-                <a:solidFill>
-                  <a:srgbClr val="1F2A44"/>
-                </a:solidFill>
-                <a:latin typeface="Nunito Sans"/>
-              </a:rPr>
-              <a:t>B cause A</a:t>
-            </a:r>
-          </a:p>
-          <a:p>
-            <a:pPr>
-              <a:spcAft>
-                <a:spcPts val="1260"/>
-              </a:spcAft>
-            </a:pPr>
-            <a:r>
-              <a:rPr sz="2800" b="1">
-                <a:solidFill>
-                  <a:srgbClr val="E8793A"/>
-                </a:solidFill>
-                <a:latin typeface="Nunito Sans"/>
-              </a:rPr>
-              <a:t>• </a:t>
-            </a:r>
-            <a:r>
-              <a:rPr sz="2800" b="0">
-                <a:solidFill>
-                  <a:srgbClr val="1F2A44"/>
-                </a:solidFill>
-                <a:latin typeface="Nunito Sans"/>
-              </a:rPr>
-              <a:t>Una tercera causa produzca los dos</a:t>
-            </a:r>
-          </a:p>
-          <a:p>
-            <a:pPr>
-              <a:spcAft>
-                <a:spcPts val="1260"/>
-              </a:spcAft>
-            </a:pPr>
-            <a:r>
-              <a:rPr sz="2800" b="1">
-                <a:solidFill>
-                  <a:srgbClr val="E8793A"/>
-                </a:solidFill>
-                <a:latin typeface="Nunito Sans"/>
-              </a:rPr>
-              <a:t>• </a:t>
-            </a:r>
-            <a:r>
-              <a:rPr sz="2800" b="0">
-                <a:solidFill>
-                  <a:srgbClr val="1F2A44"/>
-                </a:solidFill>
-                <a:latin typeface="Nunito Sans"/>
-              </a:rPr>
-              <a:t>Sea pura casualidad</a:t>
+              <a:t>Casos resueltos</a:t>
             </a:r>
           </a:p>
         </p:txBody>
